--- a/metadata/presentation/thesis_defense_presentation.pptx
+++ b/metadata/presentation/thesis_defense_presentation.pptx
@@ -128,6 +128,11 @@
       </a:defRPr>
     </a:lvl9pPr>
   </p:defaultTextStyle>
+  <p:extLst>
+    <p:ext uri="{EFAFB233-063F-42B5-8137-9DF3F51BA10A}">
+      <p15:sldGuideLst xmlns:p15="http://schemas.microsoft.com/office/powerpoint/2012/main"/>
+    </p:ext>
+  </p:extLst>
 </p:presentation>
 </file>
 
@@ -1829,7 +1834,7 @@
           <a:bodyPr/>
           <a:lstStyle/>
           <a:p>
-            <a:endParaRPr/>
+            <a:endParaRPr dirty="0"/>
           </a:p>
         </p:txBody>
       </p:sp>
@@ -2509,7 +2514,7 @@
               </a:defRPr>
             </a:pPr>
             <a:r>
-              <a:rPr sz="1200" b="0" i="0">
+              <a:rPr sz="1200" b="0" i="0" dirty="0" err="1">
                 <a:solidFill>
                   <a:srgbClr val="617080"/>
                 </a:solidFill>
@@ -2517,8 +2522,137 @@
                 <a:ea typeface="Arial"/>
                 <a:cs typeface="Arial"/>
               </a:rPr>
-              <a:t>Универзитет „Св. Кирил и Методиј“ во Скопје</a:t>
-            </a:r>
+              <a:t>Универзитет</a:t>
+            </a:r>
+            <a:r>
+              <a:rPr sz="1200" b="0" i="0" dirty="0">
+                <a:solidFill>
+                  <a:srgbClr val="617080"/>
+                </a:solidFill>
+                <a:latin typeface="Arial"/>
+                <a:ea typeface="Arial"/>
+                <a:cs typeface="Arial"/>
+              </a:rPr>
+              <a:t> „</a:t>
+            </a:r>
+            <a:r>
+              <a:rPr sz="1200" b="0" i="0" dirty="0" err="1">
+                <a:solidFill>
+                  <a:srgbClr val="617080"/>
+                </a:solidFill>
+                <a:latin typeface="Arial"/>
+                <a:ea typeface="Arial"/>
+                <a:cs typeface="Arial"/>
+              </a:rPr>
+              <a:t>Св</a:t>
+            </a:r>
+            <a:r>
+              <a:rPr sz="1200" b="0" i="0" dirty="0">
+                <a:solidFill>
+                  <a:srgbClr val="617080"/>
+                </a:solidFill>
+                <a:latin typeface="Arial"/>
+                <a:ea typeface="Arial"/>
+                <a:cs typeface="Arial"/>
+              </a:rPr>
+              <a:t>. </a:t>
+            </a:r>
+            <a:r>
+              <a:rPr sz="1200" b="0" i="0" dirty="0" err="1">
+                <a:solidFill>
+                  <a:srgbClr val="617080"/>
+                </a:solidFill>
+                <a:latin typeface="Arial"/>
+                <a:ea typeface="Arial"/>
+                <a:cs typeface="Arial"/>
+              </a:rPr>
+              <a:t>Кирил</a:t>
+            </a:r>
+            <a:r>
+              <a:rPr sz="1200" b="0" i="0" dirty="0">
+                <a:solidFill>
+                  <a:srgbClr val="617080"/>
+                </a:solidFill>
+                <a:latin typeface="Arial"/>
+                <a:ea typeface="Arial"/>
+                <a:cs typeface="Arial"/>
+              </a:rPr>
+              <a:t> </a:t>
+            </a:r>
+            <a:r>
+              <a:rPr sz="1200" b="0" i="0" dirty="0" err="1">
+                <a:solidFill>
+                  <a:srgbClr val="617080"/>
+                </a:solidFill>
+                <a:latin typeface="Arial"/>
+                <a:ea typeface="Arial"/>
+                <a:cs typeface="Arial"/>
+              </a:rPr>
+              <a:t>и</a:t>
+            </a:r>
+            <a:r>
+              <a:rPr sz="1200" b="0" i="0" dirty="0">
+                <a:solidFill>
+                  <a:srgbClr val="617080"/>
+                </a:solidFill>
+                <a:latin typeface="Arial"/>
+                <a:ea typeface="Arial"/>
+                <a:cs typeface="Arial"/>
+              </a:rPr>
+              <a:t> </a:t>
+            </a:r>
+            <a:r>
+              <a:rPr sz="1200" b="0" i="0" dirty="0" err="1">
+                <a:solidFill>
+                  <a:srgbClr val="617080"/>
+                </a:solidFill>
+                <a:latin typeface="Arial"/>
+                <a:ea typeface="Arial"/>
+                <a:cs typeface="Arial"/>
+              </a:rPr>
+              <a:t>Методиј</a:t>
+            </a:r>
+            <a:r>
+              <a:rPr sz="1200" b="0" i="0" dirty="0">
+                <a:solidFill>
+                  <a:srgbClr val="617080"/>
+                </a:solidFill>
+                <a:latin typeface="Arial"/>
+                <a:ea typeface="Arial"/>
+                <a:cs typeface="Arial"/>
+              </a:rPr>
+              <a:t>“</a:t>
+            </a:r>
+            <a:r>
+              <a:rPr lang="mk-MK" sz="1200" b="0" i="0" dirty="0">
+                <a:solidFill>
+                  <a:srgbClr val="617080"/>
+                </a:solidFill>
+                <a:latin typeface="Arial"/>
+                <a:ea typeface="Arial"/>
+                <a:cs typeface="Arial"/>
+              </a:rPr>
+              <a:t> - </a:t>
+            </a:r>
+            <a:r>
+              <a:rPr sz="1200" b="0" i="0" dirty="0" err="1">
+                <a:solidFill>
+                  <a:srgbClr val="617080"/>
+                </a:solidFill>
+                <a:latin typeface="Arial"/>
+                <a:ea typeface="Arial"/>
+                <a:cs typeface="Arial"/>
+              </a:rPr>
+              <a:t>Скопје</a:t>
+            </a:r>
+            <a:endParaRPr sz="1200" b="0" i="0" dirty="0">
+              <a:solidFill>
+                <a:srgbClr val="617080"/>
+              </a:solidFill>
+              <a:latin typeface="Arial"/>
+              <a:ea typeface="Arial"/>
+              <a:cs typeface="Arial"/>
+            </a:endParaRPr>
           </a:p>
         </p:txBody>
       </p:sp>
@@ -3301,16 +3435,24 @@
               </a:defRPr>
             </a:pPr>
             <a:r>
-              <a:rPr sz="1275" b="0" i="0">
-                <a:solidFill>
-                  <a:srgbClr val="263746"/>
-                </a:solidFill>
-                <a:latin typeface="Arial"/>
-                <a:ea typeface="Arial"/>
-                <a:cs typeface="Arial"/>
-              </a:rPr>
-              <a:t>Повеќе инструкции се извлекуваат од прашањето.</a:t>
-            </a:r>
+              <a:rPr lang="mk-MK" sz="1275" b="0" i="0" dirty="0">
+                <a:solidFill>
+                  <a:srgbClr val="263746"/>
+                </a:solidFill>
+                <a:latin typeface="Arial"/>
+                <a:ea typeface="Arial"/>
+                <a:cs typeface="Arial"/>
+              </a:rPr>
+              <a:t>Од прашањето се извлекуваат повеќе инструкции</a:t>
+            </a:r>
+            <a:endParaRPr sz="1275" b="0" i="0" dirty="0">
+              <a:solidFill>
+                <a:srgbClr val="263746"/>
+              </a:solidFill>
+              <a:latin typeface="Arial"/>
+              <a:ea typeface="Arial"/>
+              <a:cs typeface="Arial"/>
+            </a:endParaRPr>
           </a:p>
         </p:txBody>
       </p:sp>
@@ -3661,6 +3803,58 @@
               </a:rPr>
               <a:t>ReaRev го менува толкувањето на прашањето според информацијата откриена во графот.</a:t>
             </a:r>
+          </a:p>
+        </p:txBody>
+      </p:sp>
+      <p:sp>
+        <p:nvSpPr>
+          <p:cNvPr id="5" name="Rectangle 4">
+            <a:extLst>
+              <a:ext uri="{FF2B5EF4-FFF2-40B4-BE49-F238E27FC236}">
+                <a16:creationId xmlns:a16="http://schemas.microsoft.com/office/drawing/2014/main" id="{38EA2F7D-04C6-C46E-5C8A-CEC7C3B2B0DC}"/>
+              </a:ext>
+            </a:extLst>
+          </p:cNvPr>
+          <p:cNvSpPr/>
+          <p:nvPr/>
+        </p:nvSpPr>
+        <p:spPr>
+          <a:xfrm>
+            <a:off x="857250" y="4859383"/>
+            <a:ext cx="6309904" cy="531767"/>
+          </a:xfrm>
+          <a:prstGeom prst="rect">
+            <a:avLst/>
+          </a:prstGeom>
+          <a:solidFill>
+            <a:schemeClr val="bg1"/>
+          </a:solidFill>
+          <a:ln>
+            <a:noFill/>
+          </a:ln>
+        </p:spPr>
+        <p:style>
+          <a:lnRef idx="2">
+            <a:schemeClr val="accent1">
+              <a:shade val="15000"/>
+            </a:schemeClr>
+          </a:lnRef>
+          <a:fillRef idx="1">
+            <a:schemeClr val="accent1"/>
+          </a:fillRef>
+          <a:effectRef idx="0">
+            <a:schemeClr val="accent1"/>
+          </a:effectRef>
+          <a:fontRef idx="minor">
+            <a:schemeClr val="lt1"/>
+          </a:fontRef>
+        </p:style>
+        <p:txBody>
+          <a:bodyPr rtlCol="0" anchor="ctr"/>
+          <a:lstStyle/>
+          <a:p>
+            <a:pPr algn="ctr"/>
+            <a:endParaRPr lang="en-US"/>
           </a:p>
         </p:txBody>
       </p:sp>
@@ -4444,6 +4638,58 @@
           </a:p>
         </p:txBody>
       </p:sp>
+      <p:sp>
+        <p:nvSpPr>
+          <p:cNvPr id="5" name="Rectangle 4">
+            <a:extLst>
+              <a:ext uri="{FF2B5EF4-FFF2-40B4-BE49-F238E27FC236}">
+                <a16:creationId xmlns:a16="http://schemas.microsoft.com/office/drawing/2014/main" id="{C09A2899-8BE1-78E1-B211-95ACB6B3407C}"/>
+              </a:ext>
+            </a:extLst>
+          </p:cNvPr>
+          <p:cNvSpPr/>
+          <p:nvPr/>
+        </p:nvSpPr>
+        <p:spPr>
+          <a:xfrm>
+            <a:off x="964610" y="4731612"/>
+            <a:ext cx="6309904" cy="531767"/>
+          </a:xfrm>
+          <a:prstGeom prst="rect">
+            <a:avLst/>
+          </a:prstGeom>
+          <a:solidFill>
+            <a:schemeClr val="bg1"/>
+          </a:solidFill>
+          <a:ln>
+            <a:noFill/>
+          </a:ln>
+        </p:spPr>
+        <p:style>
+          <a:lnRef idx="2">
+            <a:schemeClr val="accent1">
+              <a:shade val="15000"/>
+            </a:schemeClr>
+          </a:lnRef>
+          <a:fillRef idx="1">
+            <a:schemeClr val="accent1"/>
+          </a:fillRef>
+          <a:effectRef idx="0">
+            <a:schemeClr val="accent1"/>
+          </a:effectRef>
+          <a:fontRef idx="minor">
+            <a:schemeClr val="lt1"/>
+          </a:fontRef>
+        </p:style>
+        <p:txBody>
+          <a:bodyPr rtlCol="0" anchor="ctr"/>
+          <a:lstStyle/>
+          <a:p>
+            <a:pPr algn="ctr"/>
+            <a:endParaRPr lang="en-US"/>
+          </a:p>
+        </p:txBody>
+      </p:sp>
     </p:spTree>
     <p:extLst>
       <p:ext uri="{BB962C8B-B14F-4D97-AF65-F5344CB8AC3E}">
@@ -4877,16 +5123,222 @@
               </a:defRPr>
             </a:pPr>
             <a:r>
-              <a:rPr sz="1350" b="0" i="0">
-                <a:solidFill>
-                  <a:srgbClr val="263746"/>
-                </a:solidFill>
-                <a:latin typeface="Arial"/>
-                <a:ea typeface="Arial"/>
-                <a:cs typeface="Arial"/>
-              </a:rPr>
-              <a:t>Hits@1 / Hits@10 — барем еден точен одговор во првите 1 или 10 позиции</a:t>
-            </a:r>
+              <a:rPr sz="1350" b="1" i="0" dirty="0">
+                <a:solidFill>
+                  <a:srgbClr val="263746"/>
+                </a:solidFill>
+                <a:latin typeface="Arial"/>
+                <a:ea typeface="Arial"/>
+                <a:cs typeface="Arial"/>
+              </a:rPr>
+              <a:t>Hits@1 </a:t>
+            </a:r>
+            <a:r>
+              <a:rPr sz="1350" b="0" i="0" dirty="0">
+                <a:solidFill>
+                  <a:srgbClr val="263746"/>
+                </a:solidFill>
+                <a:latin typeface="Arial"/>
+                <a:ea typeface="Arial"/>
+                <a:cs typeface="Arial"/>
+              </a:rPr>
+              <a:t>/ </a:t>
+            </a:r>
+            <a:r>
+              <a:rPr sz="1350" b="1" i="0" dirty="0">
+                <a:solidFill>
+                  <a:srgbClr val="263746"/>
+                </a:solidFill>
+                <a:latin typeface="Arial"/>
+                <a:ea typeface="Arial"/>
+                <a:cs typeface="Arial"/>
+              </a:rPr>
+              <a:t>Hits@10 </a:t>
+            </a:r>
+            <a:r>
+              <a:rPr sz="1350" b="0" i="0" dirty="0">
+                <a:solidFill>
+                  <a:srgbClr val="263746"/>
+                </a:solidFill>
+                <a:latin typeface="Arial"/>
+                <a:ea typeface="Arial"/>
+                <a:cs typeface="Arial"/>
+              </a:rPr>
+              <a:t>— </a:t>
+            </a:r>
+            <a:r>
+              <a:rPr sz="1350" b="0" i="0" dirty="0" err="1">
+                <a:solidFill>
+                  <a:srgbClr val="263746"/>
+                </a:solidFill>
+                <a:latin typeface="Arial"/>
+                <a:ea typeface="Arial"/>
+                <a:cs typeface="Arial"/>
+              </a:rPr>
+              <a:t>барем</a:t>
+            </a:r>
+            <a:r>
+              <a:rPr sz="1350" b="0" i="0" dirty="0">
+                <a:solidFill>
+                  <a:srgbClr val="263746"/>
+                </a:solidFill>
+                <a:latin typeface="Arial"/>
+                <a:ea typeface="Arial"/>
+                <a:cs typeface="Arial"/>
+              </a:rPr>
+              <a:t> </a:t>
+            </a:r>
+            <a:r>
+              <a:rPr sz="1350" b="0" i="0" dirty="0" err="1">
+                <a:solidFill>
+                  <a:srgbClr val="263746"/>
+                </a:solidFill>
+                <a:latin typeface="Arial"/>
+                <a:ea typeface="Arial"/>
+                <a:cs typeface="Arial"/>
+              </a:rPr>
+              <a:t>еден</a:t>
+            </a:r>
+            <a:r>
+              <a:rPr sz="1350" b="0" i="0" dirty="0">
+                <a:solidFill>
+                  <a:srgbClr val="263746"/>
+                </a:solidFill>
+                <a:latin typeface="Arial"/>
+                <a:ea typeface="Arial"/>
+                <a:cs typeface="Arial"/>
+              </a:rPr>
+              <a:t> </a:t>
+            </a:r>
+            <a:r>
+              <a:rPr sz="1350" b="0" i="0" dirty="0" err="1">
+                <a:solidFill>
+                  <a:srgbClr val="263746"/>
+                </a:solidFill>
+                <a:latin typeface="Arial"/>
+                <a:ea typeface="Arial"/>
+                <a:cs typeface="Arial"/>
+              </a:rPr>
+              <a:t>точен</a:t>
+            </a:r>
+            <a:r>
+              <a:rPr sz="1350" b="0" i="0" dirty="0">
+                <a:solidFill>
+                  <a:srgbClr val="263746"/>
+                </a:solidFill>
+                <a:latin typeface="Arial"/>
+                <a:ea typeface="Arial"/>
+                <a:cs typeface="Arial"/>
+              </a:rPr>
+              <a:t> </a:t>
+            </a:r>
+            <a:r>
+              <a:rPr sz="1350" b="0" i="0" dirty="0" err="1">
+                <a:solidFill>
+                  <a:srgbClr val="263746"/>
+                </a:solidFill>
+                <a:latin typeface="Arial"/>
+                <a:ea typeface="Arial"/>
+                <a:cs typeface="Arial"/>
+              </a:rPr>
+              <a:t>одговор</a:t>
+            </a:r>
+            <a:r>
+              <a:rPr sz="1350" b="0" i="0" dirty="0">
+                <a:solidFill>
+                  <a:srgbClr val="263746"/>
+                </a:solidFill>
+                <a:latin typeface="Arial"/>
+                <a:ea typeface="Arial"/>
+                <a:cs typeface="Arial"/>
+              </a:rPr>
+              <a:t> </a:t>
+            </a:r>
+            <a:r>
+              <a:rPr sz="1350" b="0" i="0" dirty="0" err="1">
+                <a:solidFill>
+                  <a:srgbClr val="263746"/>
+                </a:solidFill>
+                <a:latin typeface="Arial"/>
+                <a:ea typeface="Arial"/>
+                <a:cs typeface="Arial"/>
+              </a:rPr>
+              <a:t>во</a:t>
+            </a:r>
+            <a:r>
+              <a:rPr sz="1350" b="0" i="0" dirty="0">
+                <a:solidFill>
+                  <a:srgbClr val="263746"/>
+                </a:solidFill>
+                <a:latin typeface="Arial"/>
+                <a:ea typeface="Arial"/>
+                <a:cs typeface="Arial"/>
+              </a:rPr>
+              <a:t> </a:t>
+            </a:r>
+            <a:r>
+              <a:rPr sz="1350" b="0" i="0" dirty="0" err="1">
+                <a:solidFill>
+                  <a:srgbClr val="263746"/>
+                </a:solidFill>
+                <a:latin typeface="Arial"/>
+                <a:ea typeface="Arial"/>
+                <a:cs typeface="Arial"/>
+              </a:rPr>
+              <a:t>првите</a:t>
+            </a:r>
+            <a:r>
+              <a:rPr sz="1350" b="0" i="0" dirty="0">
+                <a:solidFill>
+                  <a:srgbClr val="263746"/>
+                </a:solidFill>
+                <a:latin typeface="Arial"/>
+                <a:ea typeface="Arial"/>
+                <a:cs typeface="Arial"/>
+              </a:rPr>
+              <a:t> 1</a:t>
+            </a:r>
+            <a:r>
+              <a:rPr lang="mk-MK" sz="1350" b="0" i="0" dirty="0">
+                <a:solidFill>
+                  <a:srgbClr val="263746"/>
+                </a:solidFill>
+                <a:latin typeface="Arial"/>
+                <a:ea typeface="Arial"/>
+                <a:cs typeface="Arial"/>
+              </a:rPr>
+              <a:t>, односно </a:t>
+            </a:r>
+            <a:r>
+              <a:rPr sz="1350" b="0" i="0" dirty="0">
+                <a:solidFill>
+                  <a:srgbClr val="263746"/>
+                </a:solidFill>
+                <a:latin typeface="Arial"/>
+                <a:ea typeface="Arial"/>
+                <a:cs typeface="Arial"/>
+              </a:rPr>
+              <a:t>10 </a:t>
+            </a:r>
+            <a:r>
+              <a:rPr lang="mk-MK" sz="1350" b="0" i="0" dirty="0">
+                <a:solidFill>
+                  <a:srgbClr val="263746"/>
+                </a:solidFill>
+                <a:latin typeface="Arial"/>
+                <a:ea typeface="Arial"/>
+                <a:cs typeface="Arial"/>
+              </a:rPr>
+              <a:t>кандидати</a:t>
+            </a:r>
+            <a:endParaRPr sz="1350" b="0" i="0" dirty="0">
+              <a:solidFill>
+                <a:srgbClr val="263746"/>
+              </a:solidFill>
+              <a:latin typeface="Arial"/>
+              <a:ea typeface="Arial"/>
+              <a:cs typeface="Arial"/>
+            </a:endParaRPr>
           </a:p>
         </p:txBody>
       </p:sp>
@@ -4973,16 +5425,222 @@
               </a:defRPr>
             </a:pPr>
             <a:r>
-              <a:rPr sz="1350" b="0" i="0">
-                <a:solidFill>
-                  <a:srgbClr val="263746"/>
-                </a:solidFill>
-                <a:latin typeface="Arial"/>
-                <a:ea typeface="Arial"/>
-                <a:cs typeface="Arial"/>
-              </a:rPr>
-              <a:t>nDCG@10 — позицијата и бројот на точни одговори во првите 10</a:t>
-            </a:r>
+              <a:rPr sz="1350" b="1" i="0" dirty="0">
+                <a:solidFill>
+                  <a:srgbClr val="263746"/>
+                </a:solidFill>
+                <a:latin typeface="Arial"/>
+                <a:ea typeface="Arial"/>
+                <a:cs typeface="Arial"/>
+              </a:rPr>
+              <a:t>nDCG@10 </a:t>
+            </a:r>
+            <a:r>
+              <a:rPr sz="1350" b="0" i="0" dirty="0">
+                <a:solidFill>
+                  <a:srgbClr val="263746"/>
+                </a:solidFill>
+                <a:latin typeface="Arial"/>
+                <a:ea typeface="Arial"/>
+                <a:cs typeface="Arial"/>
+              </a:rPr>
+              <a:t>— </a:t>
+            </a:r>
+            <a:r>
+              <a:rPr sz="1350" b="0" i="0" dirty="0" err="1">
+                <a:solidFill>
+                  <a:srgbClr val="263746"/>
+                </a:solidFill>
+                <a:latin typeface="Arial"/>
+                <a:ea typeface="Arial"/>
+                <a:cs typeface="Arial"/>
+              </a:rPr>
+              <a:t>позицијата</a:t>
+            </a:r>
+            <a:r>
+              <a:rPr sz="1350" b="0" i="0" dirty="0">
+                <a:solidFill>
+                  <a:srgbClr val="263746"/>
+                </a:solidFill>
+                <a:latin typeface="Arial"/>
+                <a:ea typeface="Arial"/>
+                <a:cs typeface="Arial"/>
+              </a:rPr>
+              <a:t> </a:t>
+            </a:r>
+            <a:r>
+              <a:rPr sz="1350" b="0" i="0" dirty="0" err="1">
+                <a:solidFill>
+                  <a:srgbClr val="263746"/>
+                </a:solidFill>
+                <a:latin typeface="Arial"/>
+                <a:ea typeface="Arial"/>
+                <a:cs typeface="Arial"/>
+              </a:rPr>
+              <a:t>и</a:t>
+            </a:r>
+            <a:r>
+              <a:rPr sz="1350" b="0" i="0" dirty="0">
+                <a:solidFill>
+                  <a:srgbClr val="263746"/>
+                </a:solidFill>
+                <a:latin typeface="Arial"/>
+                <a:ea typeface="Arial"/>
+                <a:cs typeface="Arial"/>
+              </a:rPr>
+              <a:t> </a:t>
+            </a:r>
+            <a:r>
+              <a:rPr sz="1350" b="0" i="0" dirty="0" err="1">
+                <a:solidFill>
+                  <a:srgbClr val="263746"/>
+                </a:solidFill>
+                <a:latin typeface="Arial"/>
+                <a:ea typeface="Arial"/>
+                <a:cs typeface="Arial"/>
+              </a:rPr>
+              <a:t>бројот</a:t>
+            </a:r>
+            <a:r>
+              <a:rPr sz="1350" b="0" i="0" dirty="0">
+                <a:solidFill>
+                  <a:srgbClr val="263746"/>
+                </a:solidFill>
+                <a:latin typeface="Arial"/>
+                <a:ea typeface="Arial"/>
+                <a:cs typeface="Arial"/>
+              </a:rPr>
+              <a:t> </a:t>
+            </a:r>
+            <a:r>
+              <a:rPr sz="1350" b="0" i="0" dirty="0" err="1">
+                <a:solidFill>
+                  <a:srgbClr val="263746"/>
+                </a:solidFill>
+                <a:latin typeface="Arial"/>
+                <a:ea typeface="Arial"/>
+                <a:cs typeface="Arial"/>
+              </a:rPr>
+              <a:t>на</a:t>
+            </a:r>
+            <a:r>
+              <a:rPr sz="1350" b="0" i="0" dirty="0">
+                <a:solidFill>
+                  <a:srgbClr val="263746"/>
+                </a:solidFill>
+                <a:latin typeface="Arial"/>
+                <a:ea typeface="Arial"/>
+                <a:cs typeface="Arial"/>
+              </a:rPr>
+              <a:t> </a:t>
+            </a:r>
+            <a:r>
+              <a:rPr sz="1350" b="0" i="0" dirty="0" err="1">
+                <a:solidFill>
+                  <a:srgbClr val="263746"/>
+                </a:solidFill>
+                <a:latin typeface="Arial"/>
+                <a:ea typeface="Arial"/>
+                <a:cs typeface="Arial"/>
+              </a:rPr>
+              <a:t>точни</a:t>
+            </a:r>
+            <a:r>
+              <a:rPr sz="1350" b="0" i="0" dirty="0">
+                <a:solidFill>
+                  <a:srgbClr val="263746"/>
+                </a:solidFill>
+                <a:latin typeface="Arial"/>
+                <a:ea typeface="Arial"/>
+                <a:cs typeface="Arial"/>
+              </a:rPr>
+              <a:t> </a:t>
+            </a:r>
+            <a:r>
+              <a:rPr sz="1350" b="0" i="0" dirty="0" err="1">
+                <a:solidFill>
+                  <a:srgbClr val="263746"/>
+                </a:solidFill>
+                <a:latin typeface="Arial"/>
+                <a:ea typeface="Arial"/>
+                <a:cs typeface="Arial"/>
+              </a:rPr>
+              <a:t>одговори</a:t>
+            </a:r>
+            <a:r>
+              <a:rPr sz="1350" b="0" i="0" dirty="0">
+                <a:solidFill>
+                  <a:srgbClr val="263746"/>
+                </a:solidFill>
+                <a:latin typeface="Arial"/>
+                <a:ea typeface="Arial"/>
+                <a:cs typeface="Arial"/>
+              </a:rPr>
+              <a:t> </a:t>
+            </a:r>
+            <a:r>
+              <a:rPr sz="1350" b="0" i="0" dirty="0" err="1">
+                <a:solidFill>
+                  <a:srgbClr val="263746"/>
+                </a:solidFill>
+                <a:latin typeface="Arial"/>
+                <a:ea typeface="Arial"/>
+                <a:cs typeface="Arial"/>
+              </a:rPr>
+              <a:t>во</a:t>
+            </a:r>
+            <a:r>
+              <a:rPr sz="1350" b="0" i="0" dirty="0">
+                <a:solidFill>
+                  <a:srgbClr val="263746"/>
+                </a:solidFill>
+                <a:latin typeface="Arial"/>
+                <a:ea typeface="Arial"/>
+                <a:cs typeface="Arial"/>
+              </a:rPr>
+              <a:t> </a:t>
+            </a:r>
+            <a:r>
+              <a:rPr sz="1350" b="0" i="0" dirty="0" err="1">
+                <a:solidFill>
+                  <a:srgbClr val="263746"/>
+                </a:solidFill>
+                <a:latin typeface="Arial"/>
+                <a:ea typeface="Arial"/>
+                <a:cs typeface="Arial"/>
+              </a:rPr>
+              <a:t>првите</a:t>
+            </a:r>
+            <a:r>
+              <a:rPr sz="1350" b="0" i="0" dirty="0">
+                <a:solidFill>
+                  <a:srgbClr val="263746"/>
+                </a:solidFill>
+                <a:latin typeface="Arial"/>
+                <a:ea typeface="Arial"/>
+                <a:cs typeface="Arial"/>
+              </a:rPr>
+              <a:t> 10</a:t>
+            </a:r>
+            <a:r>
+              <a:rPr lang="mk-MK" sz="1350" b="0" i="0" dirty="0">
+                <a:solidFill>
+                  <a:srgbClr val="263746"/>
+                </a:solidFill>
+                <a:latin typeface="Arial"/>
+                <a:ea typeface="Arial"/>
+                <a:cs typeface="Arial"/>
+              </a:rPr>
+              <a:t> кандидати</a:t>
+            </a:r>
+            <a:endParaRPr sz="1350" b="0" i="0" dirty="0">
+              <a:solidFill>
+                <a:srgbClr val="263746"/>
+              </a:solidFill>
+              <a:latin typeface="Arial"/>
+              <a:ea typeface="Arial"/>
+              <a:cs typeface="Arial"/>
+            </a:endParaRPr>
           </a:p>
         </p:txBody>
       </p:sp>
@@ -5131,7 +5789,7 @@
               </a:defRPr>
             </a:pPr>
             <a:r>
-              <a:rPr sz="1425" b="0" i="0">
+              <a:rPr sz="1425" b="1" i="0" dirty="0" err="1">
                 <a:solidFill>
                   <a:srgbClr val="4F86C6"/>
                 </a:solidFill>
@@ -5139,7 +5797,106 @@
                 <a:ea typeface="Arial"/>
                 <a:cs typeface="Arial"/>
               </a:rPr>
-              <a:t>RetrievalGoldCoverage = (1/|Q|) Σq |Gq ∩ Rq| / |Gq|</a:t>
+              <a:t>RetrievalGoldCoverage</a:t>
+            </a:r>
+            <a:r>
+              <a:rPr sz="1425" b="0" i="0" dirty="0">
+                <a:solidFill>
+                  <a:srgbClr val="4F86C6"/>
+                </a:solidFill>
+                <a:latin typeface="Arial"/>
+                <a:ea typeface="Arial"/>
+                <a:cs typeface="Arial"/>
+              </a:rPr>
+              <a:t> = (1/|Q|) </a:t>
+            </a:r>
+            <a:r>
+              <a:rPr sz="1425" b="0" i="0" dirty="0" err="1">
+                <a:solidFill>
+                  <a:srgbClr val="4F86C6"/>
+                </a:solidFill>
+                <a:latin typeface="Arial"/>
+                <a:ea typeface="Arial"/>
+                <a:cs typeface="Arial"/>
+              </a:rPr>
+              <a:t>Σq</a:t>
+            </a:r>
+            <a:r>
+              <a:rPr sz="1425" b="0" i="0" dirty="0">
+                <a:solidFill>
+                  <a:srgbClr val="4F86C6"/>
+                </a:solidFill>
+                <a:latin typeface="Arial"/>
+                <a:ea typeface="Arial"/>
+                <a:cs typeface="Arial"/>
+              </a:rPr>
+              <a:t> |</a:t>
+            </a:r>
+            <a:r>
+              <a:rPr sz="1425" b="0" i="0" dirty="0" err="1">
+                <a:solidFill>
+                  <a:srgbClr val="4F86C6"/>
+                </a:solidFill>
+                <a:latin typeface="Arial"/>
+                <a:ea typeface="Arial"/>
+                <a:cs typeface="Arial"/>
+              </a:rPr>
+              <a:t>Gq</a:t>
+            </a:r>
+            <a:r>
+              <a:rPr sz="1425" b="0" i="0" dirty="0">
+                <a:solidFill>
+                  <a:srgbClr val="4F86C6"/>
+                </a:solidFill>
+                <a:latin typeface="Arial"/>
+                <a:ea typeface="Arial"/>
+                <a:cs typeface="Arial"/>
+              </a:rPr>
+              <a:t> ∩ </a:t>
+            </a:r>
+            <a:r>
+              <a:rPr sz="1425" b="0" i="0" dirty="0" err="1">
+                <a:solidFill>
+                  <a:srgbClr val="4F86C6"/>
+                </a:solidFill>
+                <a:latin typeface="Arial"/>
+                <a:ea typeface="Arial"/>
+                <a:cs typeface="Arial"/>
+              </a:rPr>
+              <a:t>Rq</a:t>
+            </a:r>
+            <a:r>
+              <a:rPr sz="1425" b="0" i="0" dirty="0">
+                <a:solidFill>
+                  <a:srgbClr val="4F86C6"/>
+                </a:solidFill>
+                <a:latin typeface="Arial"/>
+                <a:ea typeface="Arial"/>
+                <a:cs typeface="Arial"/>
+              </a:rPr>
+              <a:t>| / |</a:t>
+            </a:r>
+            <a:r>
+              <a:rPr sz="1425" b="0" i="0" dirty="0" err="1">
+                <a:solidFill>
+                  <a:srgbClr val="4F86C6"/>
+                </a:solidFill>
+                <a:latin typeface="Arial"/>
+                <a:ea typeface="Arial"/>
+                <a:cs typeface="Arial"/>
+              </a:rPr>
+              <a:t>Gq</a:t>
+            </a:r>
+            <a:r>
+              <a:rPr sz="1425" b="0" i="0" dirty="0">
+                <a:solidFill>
+                  <a:srgbClr val="4F86C6"/>
+                </a:solidFill>
+                <a:latin typeface="Arial"/>
+                <a:ea typeface="Arial"/>
+                <a:cs typeface="Arial"/>
+              </a:rPr>
+              <a:t>|</a:t>
             </a:r>
           </a:p>
         </p:txBody>
@@ -5231,7 +5988,7 @@
               </a:defRPr>
             </a:pPr>
             <a:r>
-              <a:rPr sz="1425" b="0" i="0">
+              <a:rPr sz="1425" b="1" i="0" dirty="0" err="1">
                 <a:solidFill>
                   <a:srgbClr val="4F86C6"/>
                 </a:solidFill>
@@ -5239,7 +5996,84 @@
                 <a:ea typeface="Arial"/>
                 <a:cs typeface="Arial"/>
               </a:rPr>
-              <a:t>RetrievalFullGoldCoverage = (1/|Q|) Σq 𝕀(Gq ⊆ Rq)</a:t>
+              <a:t>RetrievalFullGoldCoverage</a:t>
+            </a:r>
+            <a:r>
+              <a:rPr sz="1425" b="0" i="0" dirty="0">
+                <a:solidFill>
+                  <a:srgbClr val="4F86C6"/>
+                </a:solidFill>
+                <a:latin typeface="Arial"/>
+                <a:ea typeface="Arial"/>
+                <a:cs typeface="Arial"/>
+              </a:rPr>
+              <a:t> = (1/|Q|) </a:t>
+            </a:r>
+            <a:r>
+              <a:rPr sz="1425" b="0" i="0" dirty="0" err="1">
+                <a:solidFill>
+                  <a:srgbClr val="4F86C6"/>
+                </a:solidFill>
+                <a:latin typeface="Arial"/>
+                <a:ea typeface="Arial"/>
+                <a:cs typeface="Arial"/>
+              </a:rPr>
+              <a:t>Σq</a:t>
+            </a:r>
+            <a:r>
+              <a:rPr sz="1425" b="0" i="0" dirty="0">
+                <a:solidFill>
+                  <a:srgbClr val="4F86C6"/>
+                </a:solidFill>
+                <a:latin typeface="Arial"/>
+                <a:ea typeface="Arial"/>
+                <a:cs typeface="Arial"/>
+              </a:rPr>
+              <a:t> 𝕀(</a:t>
+            </a:r>
+            <a:r>
+              <a:rPr sz="1425" b="0" i="0" dirty="0" err="1">
+                <a:solidFill>
+                  <a:srgbClr val="4F86C6"/>
+                </a:solidFill>
+                <a:latin typeface="Arial"/>
+                <a:ea typeface="Arial"/>
+                <a:cs typeface="Arial"/>
+              </a:rPr>
+              <a:t>Gq</a:t>
+            </a:r>
+            <a:r>
+              <a:rPr sz="1425" b="0" i="0" dirty="0">
+                <a:solidFill>
+                  <a:srgbClr val="4F86C6"/>
+                </a:solidFill>
+                <a:latin typeface="Arial"/>
+                <a:ea typeface="Arial"/>
+                <a:cs typeface="Arial"/>
+              </a:rPr>
+              <a:t> ⊆ </a:t>
+            </a:r>
+            <a:r>
+              <a:rPr sz="1425" b="0" i="0" dirty="0" err="1">
+                <a:solidFill>
+                  <a:srgbClr val="4F86C6"/>
+                </a:solidFill>
+                <a:latin typeface="Arial"/>
+                <a:ea typeface="Arial"/>
+                <a:cs typeface="Arial"/>
+              </a:rPr>
+              <a:t>Rq</a:t>
+            </a:r>
+            <a:r>
+              <a:rPr sz="1425" b="0" i="0" dirty="0">
+                <a:solidFill>
+                  <a:srgbClr val="4F86C6"/>
+                </a:solidFill>
+                <a:latin typeface="Arial"/>
+                <a:ea typeface="Arial"/>
+                <a:cs typeface="Arial"/>
+              </a:rPr>
+              <a:t>)</a:t>
             </a:r>
           </a:p>
         </p:txBody>
@@ -5260,8 +6094,8 @@
         </p:nvSpPr>
         <p:spPr>
           <a:xfrm>
-            <a:off x="1714500" y="3981450"/>
-            <a:ext cx="8763000" cy="1428750"/>
+            <a:off x="2629988" y="3981450"/>
+            <a:ext cx="6418761" cy="1428750"/>
           </a:xfrm>
           <a:prstGeom prst="roundRect">
             <a:avLst>
@@ -5302,7 +6136,7 @@
         </p:nvSpPr>
         <p:spPr>
           <a:xfrm>
-            <a:off x="2047875" y="4210050"/>
+            <a:off x="2928938" y="4231684"/>
             <a:ext cx="1381125" cy="323850"/>
           </a:xfrm>
           <a:prstGeom prst="rect">
@@ -5331,7 +6165,7 @@
               </a:defRPr>
             </a:pPr>
             <a:r>
-              <a:rPr sz="1500" b="1" i="0">
+              <a:rPr sz="1500" b="1" i="0" dirty="0" err="1">
                 <a:solidFill>
                   <a:srgbClr val="263746"/>
                 </a:solidFill>
@@ -5341,6 +6175,14 @@
               </a:rPr>
               <a:t>Пример</a:t>
             </a:r>
+            <a:endParaRPr sz="1500" b="1" i="0" dirty="0">
+              <a:solidFill>
+                <a:srgbClr val="263746"/>
+              </a:solidFill>
+              <a:latin typeface="Arial"/>
+              <a:ea typeface="Arial"/>
+              <a:cs typeface="Arial"/>
+            </a:endParaRPr>
           </a:p>
         </p:txBody>
       </p:sp>
@@ -5360,7 +6202,7 @@
         </p:nvSpPr>
         <p:spPr>
           <a:xfrm>
-            <a:off x="3476625" y="4143375"/>
+            <a:off x="4119563" y="4246380"/>
             <a:ext cx="2571750" cy="514350"/>
           </a:xfrm>
           <a:prstGeom prst="rect">
@@ -5389,7 +6231,7 @@
               </a:defRPr>
             </a:pPr>
             <a:r>
-              <a:rPr sz="2325" b="1" i="0">
+              <a:rPr sz="2325" b="1" i="0" dirty="0">
                 <a:solidFill>
                   <a:srgbClr val="4F86C6"/>
                 </a:solidFill>
@@ -5418,7 +6260,7 @@
         </p:nvSpPr>
         <p:spPr>
           <a:xfrm>
-            <a:off x="3476625" y="4600575"/>
+            <a:off x="4107657" y="4717868"/>
             <a:ext cx="2571750" cy="400050"/>
           </a:xfrm>
           <a:prstGeom prst="rect">
@@ -5447,7 +6289,7 @@
               </a:defRPr>
             </a:pPr>
             <a:r>
-              <a:rPr sz="1200" b="0" i="0">
+              <a:rPr sz="1200" b="0" i="0" dirty="0" err="1">
                 <a:solidFill>
                   <a:srgbClr val="617080"/>
                 </a:solidFill>
@@ -5455,8 +6297,60 @@
                 <a:ea typeface="Arial"/>
                 <a:cs typeface="Arial"/>
               </a:rPr>
-              <a:t>пронајдени точни одговори</a:t>
-            </a:r>
+              <a:t>пронајдени</a:t>
+            </a:r>
+            <a:r>
+              <a:rPr sz="1200" b="0" i="0" dirty="0">
+                <a:solidFill>
+                  <a:srgbClr val="617080"/>
+                </a:solidFill>
+                <a:latin typeface="Arial"/>
+                <a:ea typeface="Arial"/>
+                <a:cs typeface="Arial"/>
+              </a:rPr>
+              <a:t> </a:t>
+            </a:r>
+            <a:r>
+              <a:rPr sz="1200" b="0" i="0" dirty="0" err="1">
+                <a:solidFill>
+                  <a:srgbClr val="617080"/>
+                </a:solidFill>
+                <a:latin typeface="Arial"/>
+                <a:ea typeface="Arial"/>
+                <a:cs typeface="Arial"/>
+              </a:rPr>
+              <a:t>точни</a:t>
+            </a:r>
+            <a:r>
+              <a:rPr sz="1200" b="0" i="0" dirty="0">
+                <a:solidFill>
+                  <a:srgbClr val="617080"/>
+                </a:solidFill>
+                <a:latin typeface="Arial"/>
+                <a:ea typeface="Arial"/>
+                <a:cs typeface="Arial"/>
+              </a:rPr>
+              <a:t> </a:t>
+            </a:r>
+            <a:r>
+              <a:rPr sz="1200" b="0" i="0" dirty="0" err="1">
+                <a:solidFill>
+                  <a:srgbClr val="617080"/>
+                </a:solidFill>
+                <a:latin typeface="Arial"/>
+                <a:ea typeface="Arial"/>
+                <a:cs typeface="Arial"/>
+              </a:rPr>
+              <a:t>одговори</a:t>
+            </a:r>
+            <a:endParaRPr sz="1200" b="0" i="0" dirty="0">
+              <a:solidFill>
+                <a:srgbClr val="617080"/>
+              </a:solidFill>
+              <a:latin typeface="Arial"/>
+              <a:ea typeface="Arial"/>
+              <a:cs typeface="Arial"/>
+            </a:endParaRPr>
           </a:p>
         </p:txBody>
       </p:sp>
@@ -5476,7 +6370,7 @@
         </p:nvSpPr>
         <p:spPr>
           <a:xfrm>
-            <a:off x="6667500" y="4143375"/>
+            <a:off x="6191250" y="4231684"/>
             <a:ext cx="2381250" cy="514350"/>
           </a:xfrm>
           <a:prstGeom prst="rect">
@@ -5505,7 +6399,7 @@
               </a:defRPr>
             </a:pPr>
             <a:r>
-              <a:rPr sz="2325" b="1" i="0">
+              <a:rPr sz="2325" b="1" i="0" dirty="0">
                 <a:solidFill>
                   <a:srgbClr val="D97942"/>
                 </a:solidFill>
@@ -5534,7 +6428,7 @@
         </p:nvSpPr>
         <p:spPr>
           <a:xfrm>
-            <a:off x="6667500" y="4600575"/>
+            <a:off x="6215063" y="4703172"/>
             <a:ext cx="2381250" cy="400050"/>
           </a:xfrm>
           <a:prstGeom prst="rect">
@@ -5563,7 +6457,7 @@
               </a:defRPr>
             </a:pPr>
             <a:r>
-              <a:rPr sz="1200" b="0" i="0">
+              <a:rPr sz="1200" b="0" i="0" dirty="0" err="1">
                 <a:solidFill>
                   <a:srgbClr val="617080"/>
                 </a:solidFill>
@@ -5571,8 +6465,38 @@
                 <a:ea typeface="Arial"/>
                 <a:cs typeface="Arial"/>
               </a:rPr>
-              <a:t>целосна покриеност</a:t>
-            </a:r>
+              <a:t>целосна</a:t>
+            </a:r>
+            <a:r>
+              <a:rPr sz="1200" b="0" i="0" dirty="0">
+                <a:solidFill>
+                  <a:srgbClr val="617080"/>
+                </a:solidFill>
+                <a:latin typeface="Arial"/>
+                <a:ea typeface="Arial"/>
+                <a:cs typeface="Arial"/>
+              </a:rPr>
+              <a:t> </a:t>
+            </a:r>
+            <a:r>
+              <a:rPr sz="1200" b="0" i="0" dirty="0" err="1">
+                <a:solidFill>
+                  <a:srgbClr val="617080"/>
+                </a:solidFill>
+                <a:latin typeface="Arial"/>
+                <a:ea typeface="Arial"/>
+                <a:cs typeface="Arial"/>
+              </a:rPr>
+              <a:t>покриеност</a:t>
+            </a:r>
+            <a:endParaRPr sz="1200" b="0" i="0" dirty="0">
+              <a:solidFill>
+                <a:srgbClr val="617080"/>
+              </a:solidFill>
+              <a:latin typeface="Arial"/>
+              <a:ea typeface="Arial"/>
+              <a:cs typeface="Arial"/>
+            </a:endParaRPr>
           </a:p>
         </p:txBody>
       </p:sp>
@@ -7579,16 +8503,68 @@
               </a:defRPr>
             </a:pPr>
             <a:r>
-              <a:rPr sz="1275" b="0" i="0">
-                <a:solidFill>
-                  <a:srgbClr val="263746"/>
-                </a:solidFill>
-                <a:latin typeface="Arial"/>
-                <a:ea typeface="Arial"/>
-                <a:cs typeface="Arial"/>
-              </a:rPr>
-              <a:t>просечен број тројки</a:t>
-            </a:r>
+              <a:rPr sz="1275" b="0" i="0" dirty="0" err="1">
+                <a:solidFill>
+                  <a:srgbClr val="263746"/>
+                </a:solidFill>
+                <a:latin typeface="Arial"/>
+                <a:ea typeface="Arial"/>
+                <a:cs typeface="Arial"/>
+              </a:rPr>
+              <a:t>просечен</a:t>
+            </a:r>
+            <a:r>
+              <a:rPr sz="1275" b="0" i="0" dirty="0">
+                <a:solidFill>
+                  <a:srgbClr val="263746"/>
+                </a:solidFill>
+                <a:latin typeface="Arial"/>
+                <a:ea typeface="Arial"/>
+                <a:cs typeface="Arial"/>
+              </a:rPr>
+              <a:t> </a:t>
+            </a:r>
+            <a:r>
+              <a:rPr sz="1275" b="0" i="0" dirty="0" err="1">
+                <a:solidFill>
+                  <a:srgbClr val="263746"/>
+                </a:solidFill>
+                <a:latin typeface="Arial"/>
+                <a:ea typeface="Arial"/>
+                <a:cs typeface="Arial"/>
+              </a:rPr>
+              <a:t>број</a:t>
+            </a:r>
+            <a:r>
+              <a:rPr sz="1275" b="0" i="0" dirty="0">
+                <a:solidFill>
+                  <a:srgbClr val="263746"/>
+                </a:solidFill>
+                <a:latin typeface="Arial"/>
+                <a:ea typeface="Arial"/>
+                <a:cs typeface="Arial"/>
+              </a:rPr>
+              <a:t> </a:t>
+            </a:r>
+            <a:r>
+              <a:rPr sz="1275" b="0" i="0" dirty="0" err="1">
+                <a:solidFill>
+                  <a:srgbClr val="263746"/>
+                </a:solidFill>
+                <a:latin typeface="Arial"/>
+                <a:ea typeface="Arial"/>
+                <a:cs typeface="Arial"/>
+              </a:rPr>
+              <a:t>тројки</a:t>
+            </a:r>
+            <a:endParaRPr sz="1275" b="0" i="0" dirty="0">
+              <a:solidFill>
+                <a:srgbClr val="263746"/>
+              </a:solidFill>
+              <a:latin typeface="Arial"/>
+              <a:ea typeface="Arial"/>
+              <a:cs typeface="Arial"/>
+            </a:endParaRPr>
           </a:p>
         </p:txBody>
       </p:sp>
@@ -7637,7 +8613,7 @@
               </a:defRPr>
             </a:pPr>
             <a:r>
-              <a:rPr sz="1425" b="1" i="0">
+              <a:rPr sz="1425" b="1" i="0" dirty="0" err="1">
                 <a:solidFill>
                   <a:srgbClr val="398D84"/>
                 </a:solidFill>
@@ -7647,6 +8623,14 @@
               </a:rPr>
               <a:t>ContextCandidateCoverage</a:t>
             </a:r>
+            <a:endParaRPr sz="1425" b="1" i="0" dirty="0">
+              <a:solidFill>
+                <a:srgbClr val="398D84"/>
+              </a:solidFill>
+              <a:latin typeface="Arial"/>
+              <a:ea typeface="Arial"/>
+              <a:cs typeface="Arial"/>
+            </a:endParaRPr>
           </a:p>
         </p:txBody>
       </p:sp>
@@ -7695,16 +8679,90 @@
               </a:defRPr>
             </a:pPr>
             <a:r>
-              <a:rPr sz="1275" b="0" i="0">
-                <a:solidFill>
-                  <a:srgbClr val="263746"/>
-                </a:solidFill>
-                <a:latin typeface="Arial"/>
-                <a:ea typeface="Arial"/>
-                <a:cs typeface="Arial"/>
-              </a:rPr>
-              <a:t>удел на задржани кандидати</a:t>
-            </a:r>
+              <a:rPr sz="1275" b="0" i="0" dirty="0" err="1">
+                <a:solidFill>
+                  <a:srgbClr val="263746"/>
+                </a:solidFill>
+                <a:latin typeface="Arial"/>
+                <a:ea typeface="Arial"/>
+                <a:cs typeface="Arial"/>
+              </a:rPr>
+              <a:t>удел</a:t>
+            </a:r>
+            <a:r>
+              <a:rPr sz="1275" b="0" i="0" dirty="0">
+                <a:solidFill>
+                  <a:srgbClr val="263746"/>
+                </a:solidFill>
+                <a:latin typeface="Arial"/>
+                <a:ea typeface="Arial"/>
+                <a:cs typeface="Arial"/>
+              </a:rPr>
+              <a:t> </a:t>
+            </a:r>
+            <a:r>
+              <a:rPr sz="1275" b="0" i="0" dirty="0" err="1">
+                <a:solidFill>
+                  <a:srgbClr val="263746"/>
+                </a:solidFill>
+                <a:latin typeface="Arial"/>
+                <a:ea typeface="Arial"/>
+                <a:cs typeface="Arial"/>
+              </a:rPr>
+              <a:t>на</a:t>
+            </a:r>
+            <a:r>
+              <a:rPr sz="1275" b="0" i="0" dirty="0">
+                <a:solidFill>
+                  <a:srgbClr val="263746"/>
+                </a:solidFill>
+                <a:latin typeface="Arial"/>
+                <a:ea typeface="Arial"/>
+                <a:cs typeface="Arial"/>
+              </a:rPr>
+              <a:t> </a:t>
+            </a:r>
+            <a:r>
+              <a:rPr sz="1275" b="0" i="0" dirty="0" err="1">
+                <a:solidFill>
+                  <a:srgbClr val="263746"/>
+                </a:solidFill>
+                <a:latin typeface="Arial"/>
+                <a:ea typeface="Arial"/>
+                <a:cs typeface="Arial"/>
+              </a:rPr>
+              <a:t>задржани</a:t>
+            </a:r>
+            <a:r>
+              <a:rPr sz="1275" b="0" i="0" dirty="0">
+                <a:solidFill>
+                  <a:srgbClr val="263746"/>
+                </a:solidFill>
+                <a:latin typeface="Arial"/>
+                <a:ea typeface="Arial"/>
+                <a:cs typeface="Arial"/>
+              </a:rPr>
+              <a:t> </a:t>
+            </a:r>
+            <a:r>
+              <a:rPr sz="1275" b="0" i="0" dirty="0" err="1">
+                <a:solidFill>
+                  <a:srgbClr val="263746"/>
+                </a:solidFill>
+                <a:latin typeface="Arial"/>
+                <a:ea typeface="Arial"/>
+                <a:cs typeface="Arial"/>
+              </a:rPr>
+              <a:t>кандидати</a:t>
+            </a:r>
+            <a:endParaRPr sz="1275" b="0" i="0" dirty="0">
+              <a:solidFill>
+                <a:srgbClr val="263746"/>
+              </a:solidFill>
+              <a:latin typeface="Arial"/>
+              <a:ea typeface="Arial"/>
+              <a:cs typeface="Arial"/>
+            </a:endParaRPr>
           </a:p>
         </p:txBody>
       </p:sp>
@@ -7920,7 +8978,7 @@
           <a:bodyPr/>
           <a:lstStyle/>
           <a:p>
-            <a:endParaRPr lang="en-US"/>
+            <a:endParaRPr lang="en-US" dirty="0"/>
           </a:p>
         </p:txBody>
       </p:sp>
@@ -7969,7 +9027,7 @@
               </a:defRPr>
             </a:pPr>
             <a:r>
-              <a:rPr sz="1425" b="0" i="0">
+              <a:rPr sz="1425" b="1" i="0" dirty="0" err="1">
                 <a:solidFill>
                   <a:srgbClr val="4E9B69"/>
                 </a:solidFill>
@@ -7977,7 +9035,106 @@
                 <a:ea typeface="Arial"/>
                 <a:cs typeface="Arial"/>
               </a:rPr>
-              <a:t>ContextGoldCoverage = (1/|Q|) Σq |Gq ∩ Cq| / |Gq|</a:t>
+              <a:t>ContextGoldCoverage</a:t>
+            </a:r>
+            <a:r>
+              <a:rPr sz="1425" b="0" i="0" dirty="0">
+                <a:solidFill>
+                  <a:srgbClr val="4E9B69"/>
+                </a:solidFill>
+                <a:latin typeface="Arial"/>
+                <a:ea typeface="Arial"/>
+                <a:cs typeface="Arial"/>
+              </a:rPr>
+              <a:t> = (1/|Q|) </a:t>
+            </a:r>
+            <a:r>
+              <a:rPr sz="1425" b="0" i="0" dirty="0" err="1">
+                <a:solidFill>
+                  <a:srgbClr val="4E9B69"/>
+                </a:solidFill>
+                <a:latin typeface="Arial"/>
+                <a:ea typeface="Arial"/>
+                <a:cs typeface="Arial"/>
+              </a:rPr>
+              <a:t>Σq</a:t>
+            </a:r>
+            <a:r>
+              <a:rPr sz="1425" b="0" i="0" dirty="0">
+                <a:solidFill>
+                  <a:srgbClr val="4E9B69"/>
+                </a:solidFill>
+                <a:latin typeface="Arial"/>
+                <a:ea typeface="Arial"/>
+                <a:cs typeface="Arial"/>
+              </a:rPr>
+              <a:t> |</a:t>
+            </a:r>
+            <a:r>
+              <a:rPr sz="1425" b="0" i="0" dirty="0" err="1">
+                <a:solidFill>
+                  <a:srgbClr val="4E9B69"/>
+                </a:solidFill>
+                <a:latin typeface="Arial"/>
+                <a:ea typeface="Arial"/>
+                <a:cs typeface="Arial"/>
+              </a:rPr>
+              <a:t>Gq</a:t>
+            </a:r>
+            <a:r>
+              <a:rPr sz="1425" b="0" i="0" dirty="0">
+                <a:solidFill>
+                  <a:srgbClr val="4E9B69"/>
+                </a:solidFill>
+                <a:latin typeface="Arial"/>
+                <a:ea typeface="Arial"/>
+                <a:cs typeface="Arial"/>
+              </a:rPr>
+              <a:t> ∩ </a:t>
+            </a:r>
+            <a:r>
+              <a:rPr sz="1425" b="0" i="0" dirty="0" err="1">
+                <a:solidFill>
+                  <a:srgbClr val="4E9B69"/>
+                </a:solidFill>
+                <a:latin typeface="Arial"/>
+                <a:ea typeface="Arial"/>
+                <a:cs typeface="Arial"/>
+              </a:rPr>
+              <a:t>Cq</a:t>
+            </a:r>
+            <a:r>
+              <a:rPr sz="1425" b="0" i="0" dirty="0">
+                <a:solidFill>
+                  <a:srgbClr val="4E9B69"/>
+                </a:solidFill>
+                <a:latin typeface="Arial"/>
+                <a:ea typeface="Arial"/>
+                <a:cs typeface="Arial"/>
+              </a:rPr>
+              <a:t>| / |</a:t>
+            </a:r>
+            <a:r>
+              <a:rPr sz="1425" b="0" i="0" dirty="0" err="1">
+                <a:solidFill>
+                  <a:srgbClr val="4E9B69"/>
+                </a:solidFill>
+                <a:latin typeface="Arial"/>
+                <a:ea typeface="Arial"/>
+                <a:cs typeface="Arial"/>
+              </a:rPr>
+              <a:t>Gq</a:t>
+            </a:r>
+            <a:r>
+              <a:rPr sz="1425" b="0" i="0" dirty="0">
+                <a:solidFill>
+                  <a:srgbClr val="4E9B69"/>
+                </a:solidFill>
+                <a:latin typeface="Arial"/>
+                <a:ea typeface="Arial"/>
+                <a:cs typeface="Arial"/>
+              </a:rPr>
+              <a:t>|</a:t>
             </a:r>
           </a:p>
         </p:txBody>
@@ -8069,7 +9226,7 @@
               </a:defRPr>
             </a:pPr>
             <a:r>
-              <a:rPr sz="1425" b="0" i="0">
+              <a:rPr sz="1425" b="1" i="0" dirty="0" err="1">
                 <a:solidFill>
                   <a:srgbClr val="4E9B69"/>
                 </a:solidFill>
@@ -8077,7 +9234,84 @@
                 <a:ea typeface="Arial"/>
                 <a:cs typeface="Arial"/>
               </a:rPr>
-              <a:t>ContextFullGoldCoverage = (1/|Q|) Σq 𝕀(Gq ⊆ Cq)</a:t>
+              <a:t>ContextFullGoldCoverage</a:t>
+            </a:r>
+            <a:r>
+              <a:rPr sz="1425" b="0" i="0" dirty="0">
+                <a:solidFill>
+                  <a:srgbClr val="4E9B69"/>
+                </a:solidFill>
+                <a:latin typeface="Arial"/>
+                <a:ea typeface="Arial"/>
+                <a:cs typeface="Arial"/>
+              </a:rPr>
+              <a:t> = (1/|Q|) </a:t>
+            </a:r>
+            <a:r>
+              <a:rPr sz="1425" b="0" i="0" dirty="0" err="1">
+                <a:solidFill>
+                  <a:srgbClr val="4E9B69"/>
+                </a:solidFill>
+                <a:latin typeface="Arial"/>
+                <a:ea typeface="Arial"/>
+                <a:cs typeface="Arial"/>
+              </a:rPr>
+              <a:t>Σq</a:t>
+            </a:r>
+            <a:r>
+              <a:rPr sz="1425" b="0" i="0" dirty="0">
+                <a:solidFill>
+                  <a:srgbClr val="4E9B69"/>
+                </a:solidFill>
+                <a:latin typeface="Arial"/>
+                <a:ea typeface="Arial"/>
+                <a:cs typeface="Arial"/>
+              </a:rPr>
+              <a:t> 𝕀(</a:t>
+            </a:r>
+            <a:r>
+              <a:rPr sz="1425" b="0" i="0" dirty="0" err="1">
+                <a:solidFill>
+                  <a:srgbClr val="4E9B69"/>
+                </a:solidFill>
+                <a:latin typeface="Arial"/>
+                <a:ea typeface="Arial"/>
+                <a:cs typeface="Arial"/>
+              </a:rPr>
+              <a:t>Gq</a:t>
+            </a:r>
+            <a:r>
+              <a:rPr sz="1425" b="0" i="0" dirty="0">
+                <a:solidFill>
+                  <a:srgbClr val="4E9B69"/>
+                </a:solidFill>
+                <a:latin typeface="Arial"/>
+                <a:ea typeface="Arial"/>
+                <a:cs typeface="Arial"/>
+              </a:rPr>
+              <a:t> ⊆ </a:t>
+            </a:r>
+            <a:r>
+              <a:rPr sz="1425" b="0" i="0" dirty="0" err="1">
+                <a:solidFill>
+                  <a:srgbClr val="4E9B69"/>
+                </a:solidFill>
+                <a:latin typeface="Arial"/>
+                <a:ea typeface="Arial"/>
+                <a:cs typeface="Arial"/>
+              </a:rPr>
+              <a:t>Cq</a:t>
+            </a:r>
+            <a:r>
+              <a:rPr sz="1425" b="0" i="0" dirty="0">
+                <a:solidFill>
+                  <a:srgbClr val="4E9B69"/>
+                </a:solidFill>
+                <a:latin typeface="Arial"/>
+                <a:ea typeface="Arial"/>
+                <a:cs typeface="Arial"/>
+              </a:rPr>
+              <a:t>)</a:t>
             </a:r>
           </a:p>
         </p:txBody>
@@ -8470,7 +9704,7 @@
         </p:nvSpPr>
         <p:spPr>
           <a:xfrm>
-            <a:off x="7858125" y="1143000"/>
+            <a:off x="7881937" y="2638425"/>
             <a:ext cx="3667125" cy="1619250"/>
           </a:xfrm>
           <a:prstGeom prst="roundRect">
@@ -8512,7 +9746,7 @@
         </p:nvSpPr>
         <p:spPr>
           <a:xfrm>
-            <a:off x="8191500" y="1381125"/>
+            <a:off x="8191499" y="2995613"/>
             <a:ext cx="3000375" cy="514350"/>
           </a:xfrm>
           <a:prstGeom prst="rect">
@@ -8541,7 +9775,7 @@
               </a:defRPr>
             </a:pPr>
             <a:r>
-              <a:rPr sz="3150" b="1" i="0">
+              <a:rPr sz="3150" b="1" i="0" dirty="0">
                 <a:solidFill>
                   <a:srgbClr val="398D84"/>
                 </a:solidFill>
@@ -8570,7 +9804,7 @@
         </p:nvSpPr>
         <p:spPr>
           <a:xfrm>
-            <a:off x="8191500" y="1838325"/>
+            <a:off x="8215311" y="3509963"/>
             <a:ext cx="3000375" cy="533400"/>
           </a:xfrm>
           <a:prstGeom prst="rect">
@@ -8599,7 +9833,7 @@
               </a:defRPr>
             </a:pPr>
             <a:r>
-              <a:rPr sz="1350" b="0" i="0">
+              <a:rPr sz="1350" b="0" i="0" dirty="0" err="1">
                 <a:solidFill>
                   <a:srgbClr val="617080"/>
                 </a:solidFill>
@@ -8607,7 +9841,84 @@
                 <a:ea typeface="Arial"/>
                 <a:cs typeface="Arial"/>
               </a:rPr>
-              <a:t>помал доказен контекст со PCST</a:t>
+              <a:t>помал</a:t>
+            </a:r>
+            <a:r>
+              <a:rPr sz="1350" b="0" i="0" dirty="0">
+                <a:solidFill>
+                  <a:srgbClr val="617080"/>
+                </a:solidFill>
+                <a:latin typeface="Arial"/>
+                <a:ea typeface="Arial"/>
+                <a:cs typeface="Arial"/>
+              </a:rPr>
+              <a:t> </a:t>
+            </a:r>
+            <a:r>
+              <a:rPr sz="1350" b="0" i="0" dirty="0" err="1">
+                <a:solidFill>
+                  <a:srgbClr val="617080"/>
+                </a:solidFill>
+                <a:latin typeface="Arial"/>
+                <a:ea typeface="Arial"/>
+                <a:cs typeface="Arial"/>
+              </a:rPr>
+              <a:t>доказен</a:t>
+            </a:r>
+            <a:r>
+              <a:rPr sz="1350" b="0" i="0" dirty="0">
+                <a:solidFill>
+                  <a:srgbClr val="617080"/>
+                </a:solidFill>
+                <a:latin typeface="Arial"/>
+                <a:ea typeface="Arial"/>
+                <a:cs typeface="Arial"/>
+              </a:rPr>
+              <a:t> </a:t>
+            </a:r>
+            <a:r>
+              <a:rPr sz="1350" b="0" i="0" dirty="0" err="1">
+                <a:solidFill>
+                  <a:srgbClr val="617080"/>
+                </a:solidFill>
+                <a:latin typeface="Arial"/>
+                <a:ea typeface="Arial"/>
+                <a:cs typeface="Arial"/>
+              </a:rPr>
+              <a:t>контекст</a:t>
+            </a:r>
+            <a:r>
+              <a:rPr sz="1350" b="0" i="0" dirty="0">
+                <a:solidFill>
+                  <a:srgbClr val="617080"/>
+                </a:solidFill>
+                <a:latin typeface="Arial"/>
+                <a:ea typeface="Arial"/>
+                <a:cs typeface="Arial"/>
+              </a:rPr>
+              <a:t> </a:t>
+            </a:r>
+            <a:r>
+              <a:rPr sz="1350" b="0" i="0" dirty="0" err="1">
+                <a:solidFill>
+                  <a:srgbClr val="617080"/>
+                </a:solidFill>
+                <a:latin typeface="Arial"/>
+                <a:ea typeface="Arial"/>
+                <a:cs typeface="Arial"/>
+              </a:rPr>
+              <a:t>со</a:t>
+            </a:r>
+            <a:r>
+              <a:rPr sz="1350" b="0" i="0" dirty="0">
+                <a:solidFill>
+                  <a:srgbClr val="617080"/>
+                </a:solidFill>
+                <a:latin typeface="Arial"/>
+                <a:ea typeface="Arial"/>
+                <a:cs typeface="Arial"/>
+              </a:rPr>
+              <a:t> PCST</a:t>
             </a:r>
           </a:p>
         </p:txBody>
@@ -8628,7 +9939,7 @@
         </p:nvSpPr>
         <p:spPr>
           <a:xfrm>
-            <a:off x="8001000" y="3143250"/>
+            <a:off x="7953375" y="1300162"/>
             <a:ext cx="3381375" cy="304800"/>
           </a:xfrm>
           <a:prstGeom prst="rect">
@@ -8657,16 +9968,68 @@
               </a:defRPr>
             </a:pPr>
             <a:r>
-              <a:rPr sz="1500" b="1" i="0">
-                <a:solidFill>
-                  <a:srgbClr val="263746"/>
-                </a:solidFill>
-                <a:latin typeface="Arial"/>
-                <a:ea typeface="Arial"/>
-                <a:cs typeface="Arial"/>
-              </a:rPr>
-              <a:t>Просечен број тројки</a:t>
-            </a:r>
+              <a:rPr sz="1500" b="1" i="0" dirty="0" err="1">
+                <a:solidFill>
+                  <a:srgbClr val="263746"/>
+                </a:solidFill>
+                <a:latin typeface="Arial"/>
+                <a:ea typeface="Arial"/>
+                <a:cs typeface="Arial"/>
+              </a:rPr>
+              <a:t>Просечен</a:t>
+            </a:r>
+            <a:r>
+              <a:rPr sz="1500" b="1" i="0" dirty="0">
+                <a:solidFill>
+                  <a:srgbClr val="263746"/>
+                </a:solidFill>
+                <a:latin typeface="Arial"/>
+                <a:ea typeface="Arial"/>
+                <a:cs typeface="Arial"/>
+              </a:rPr>
+              <a:t> </a:t>
+            </a:r>
+            <a:r>
+              <a:rPr sz="1500" b="1" i="0" dirty="0" err="1">
+                <a:solidFill>
+                  <a:srgbClr val="263746"/>
+                </a:solidFill>
+                <a:latin typeface="Arial"/>
+                <a:ea typeface="Arial"/>
+                <a:cs typeface="Arial"/>
+              </a:rPr>
+              <a:t>број</a:t>
+            </a:r>
+            <a:r>
+              <a:rPr sz="1500" b="1" i="0" dirty="0">
+                <a:solidFill>
+                  <a:srgbClr val="263746"/>
+                </a:solidFill>
+                <a:latin typeface="Arial"/>
+                <a:ea typeface="Arial"/>
+                <a:cs typeface="Arial"/>
+              </a:rPr>
+              <a:t> </a:t>
+            </a:r>
+            <a:r>
+              <a:rPr sz="1500" b="1" i="0" dirty="0" err="1">
+                <a:solidFill>
+                  <a:srgbClr val="263746"/>
+                </a:solidFill>
+                <a:latin typeface="Arial"/>
+                <a:ea typeface="Arial"/>
+                <a:cs typeface="Arial"/>
+              </a:rPr>
+              <a:t>тројки</a:t>
+            </a:r>
+            <a:endParaRPr sz="1500" b="1" i="0" dirty="0">
+              <a:solidFill>
+                <a:srgbClr val="263746"/>
+              </a:solidFill>
+              <a:latin typeface="Arial"/>
+              <a:ea typeface="Arial"/>
+              <a:cs typeface="Arial"/>
+            </a:endParaRPr>
           </a:p>
         </p:txBody>
       </p:sp>
@@ -8686,7 +10049,7 @@
         </p:nvSpPr>
         <p:spPr>
           <a:xfrm>
-            <a:off x="7953375" y="3552825"/>
+            <a:off x="7905750" y="1709737"/>
             <a:ext cx="1619250" cy="514350"/>
           </a:xfrm>
           <a:prstGeom prst="rect">
@@ -8715,7 +10078,7 @@
               </a:defRPr>
             </a:pPr>
             <a:r>
-              <a:rPr sz="2025" b="1" i="0">
+              <a:rPr sz="2025" b="1" i="0" dirty="0">
                 <a:solidFill>
                   <a:srgbClr val="4F86C6"/>
                 </a:solidFill>
@@ -8744,7 +10107,7 @@
         </p:nvSpPr>
         <p:spPr>
           <a:xfrm>
-            <a:off x="7953375" y="4010025"/>
+            <a:off x="7905750" y="2166937"/>
             <a:ext cx="1619250" cy="400050"/>
           </a:xfrm>
           <a:prstGeom prst="rect">
@@ -8773,7 +10136,7 @@
               </a:defRPr>
             </a:pPr>
             <a:r>
-              <a:rPr sz="1050" b="0" i="0">
+              <a:rPr sz="1050" b="0" i="0" dirty="0" err="1">
                 <a:solidFill>
                   <a:srgbClr val="617080"/>
                 </a:solidFill>
@@ -8781,8 +10144,38 @@
                 <a:ea typeface="Arial"/>
                 <a:cs typeface="Arial"/>
               </a:rPr>
-              <a:t>најкратки патеки</a:t>
-            </a:r>
+              <a:t>најкратки</a:t>
+            </a:r>
+            <a:r>
+              <a:rPr sz="1050" b="0" i="0" dirty="0">
+                <a:solidFill>
+                  <a:srgbClr val="617080"/>
+                </a:solidFill>
+                <a:latin typeface="Arial"/>
+                <a:ea typeface="Arial"/>
+                <a:cs typeface="Arial"/>
+              </a:rPr>
+              <a:t> </a:t>
+            </a:r>
+            <a:r>
+              <a:rPr sz="1050" b="0" i="0" dirty="0" err="1">
+                <a:solidFill>
+                  <a:srgbClr val="617080"/>
+                </a:solidFill>
+                <a:latin typeface="Arial"/>
+                <a:ea typeface="Arial"/>
+                <a:cs typeface="Arial"/>
+              </a:rPr>
+              <a:t>патеки</a:t>
+            </a:r>
+            <a:endParaRPr sz="1050" b="0" i="0" dirty="0">
+              <a:solidFill>
+                <a:srgbClr val="617080"/>
+              </a:solidFill>
+              <a:latin typeface="Arial"/>
+              <a:ea typeface="Arial"/>
+              <a:cs typeface="Arial"/>
+            </a:endParaRPr>
           </a:p>
         </p:txBody>
       </p:sp>
@@ -8802,7 +10195,7 @@
         </p:nvSpPr>
         <p:spPr>
           <a:xfrm>
-            <a:off x="9667875" y="3552825"/>
+            <a:off x="9620250" y="1709737"/>
             <a:ext cx="1809750" cy="514350"/>
           </a:xfrm>
           <a:prstGeom prst="rect">
@@ -8860,7 +10253,7 @@
         </p:nvSpPr>
         <p:spPr>
           <a:xfrm>
-            <a:off x="9667875" y="4010025"/>
+            <a:off x="9620250" y="2166937"/>
             <a:ext cx="1809750" cy="400050"/>
           </a:xfrm>
           <a:prstGeom prst="rect">
@@ -9015,7 +10408,7 @@
         <p:spPr>
           <a:xfrm>
             <a:off x="8096250" y="5019675"/>
-            <a:ext cx="3190875" cy="647700"/>
+            <a:ext cx="3238500" cy="647700"/>
           </a:xfrm>
           <a:prstGeom prst="rect">
             <a:avLst/>
@@ -9043,15 +10436,48 @@
               </a:defRPr>
             </a:pPr>
             <a:r>
-              <a:rPr sz="1275" b="0" i="0">
-                <a:solidFill>
-                  <a:srgbClr val="263746"/>
-                </a:solidFill>
-                <a:latin typeface="Arial"/>
-                <a:ea typeface="Arial"/>
-                <a:cs typeface="Arial"/>
-              </a:rPr>
-              <a:t>ContextGoldCoverage  0,888 → ≈0,881</a:t>
+              <a:rPr sz="1275" b="0" i="0" dirty="0" err="1">
+                <a:solidFill>
+                  <a:srgbClr val="263746"/>
+                </a:solidFill>
+                <a:latin typeface="Arial"/>
+                <a:ea typeface="Arial"/>
+                <a:cs typeface="Arial"/>
+              </a:rPr>
+              <a:t>ContextGoldCoverage</a:t>
+            </a:r>
+            <a:r>
+              <a:rPr sz="1275" b="0" i="0" dirty="0">
+                <a:solidFill>
+                  <a:srgbClr val="263746"/>
+                </a:solidFill>
+                <a:latin typeface="Arial"/>
+                <a:ea typeface="Arial"/>
+                <a:cs typeface="Arial"/>
+              </a:rPr>
+              <a:t>  0,888 → ≈</a:t>
+            </a:r>
+            <a:r>
+              <a:rPr lang="mk-MK" sz="1275" b="0" i="0" dirty="0">
+                <a:solidFill>
+                  <a:srgbClr val="263746"/>
+                </a:solidFill>
+                <a:latin typeface="Arial"/>
+                <a:ea typeface="Arial"/>
+                <a:cs typeface="Arial"/>
+              </a:rPr>
+              <a:t> </a:t>
+            </a:r>
+            <a:r>
+              <a:rPr sz="1275" b="0" i="0" dirty="0">
+                <a:solidFill>
+                  <a:srgbClr val="263746"/>
+                </a:solidFill>
+                <a:latin typeface="Arial"/>
+                <a:ea typeface="Arial"/>
+                <a:cs typeface="Arial"/>
+              </a:rPr>
+              <a:t>0,881</a:t>
             </a:r>
           </a:p>
           <a:p>
@@ -9066,15 +10492,48 @@
               </a:defRPr>
             </a:pPr>
             <a:r>
-              <a:rPr sz="1275" b="0" i="0">
-                <a:solidFill>
-                  <a:srgbClr val="263746"/>
-                </a:solidFill>
-                <a:latin typeface="Arial"/>
-                <a:ea typeface="Arial"/>
-                <a:cs typeface="Arial"/>
-              </a:rPr>
-              <a:t>ContextFullGoldCoverage  0,838 → ≈0,830</a:t>
+              <a:rPr sz="1275" b="0" i="0" dirty="0" err="1">
+                <a:solidFill>
+                  <a:srgbClr val="263746"/>
+                </a:solidFill>
+                <a:latin typeface="Arial"/>
+                <a:ea typeface="Arial"/>
+                <a:cs typeface="Arial"/>
+              </a:rPr>
+              <a:t>ContextFullGoldCoverage</a:t>
+            </a:r>
+            <a:r>
+              <a:rPr sz="1275" b="0" i="0" dirty="0">
+                <a:solidFill>
+                  <a:srgbClr val="263746"/>
+                </a:solidFill>
+                <a:latin typeface="Arial"/>
+                <a:ea typeface="Arial"/>
+                <a:cs typeface="Arial"/>
+              </a:rPr>
+              <a:t>  0,838 → ≈</a:t>
+            </a:r>
+            <a:r>
+              <a:rPr lang="mk-MK" sz="1275" b="0" i="0" dirty="0">
+                <a:solidFill>
+                  <a:srgbClr val="263746"/>
+                </a:solidFill>
+                <a:latin typeface="Arial"/>
+                <a:ea typeface="Arial"/>
+                <a:cs typeface="Arial"/>
+              </a:rPr>
+              <a:t> </a:t>
+            </a:r>
+            <a:r>
+              <a:rPr sz="1275" b="0" i="0" dirty="0">
+                <a:solidFill>
+                  <a:srgbClr val="263746"/>
+                </a:solidFill>
+                <a:latin typeface="Arial"/>
+                <a:ea typeface="Arial"/>
+                <a:cs typeface="Arial"/>
+              </a:rPr>
+              <a:t>0,830</a:t>
             </a:r>
           </a:p>
         </p:txBody>
@@ -9124,7 +10583,7 @@
               </a:defRPr>
             </a:pPr>
             <a:r>
-              <a:rPr sz="1200" b="1" i="0">
+              <a:rPr sz="1200" b="1" i="0" dirty="0" err="1">
                 <a:solidFill>
                   <a:srgbClr val="398D84"/>
                 </a:solidFill>
@@ -9132,7 +10591,227 @@
                 <a:ea typeface="Arial"/>
                 <a:cs typeface="Arial"/>
               </a:rPr>
-              <a:t>Стратегијата на трошок има поголемо влијание од малите промени на λ.</a:t>
+              <a:t>Стратегијата</a:t>
+            </a:r>
+            <a:r>
+              <a:rPr sz="1200" b="1" i="0" dirty="0">
+                <a:solidFill>
+                  <a:srgbClr val="398D84"/>
+                </a:solidFill>
+                <a:latin typeface="Arial"/>
+                <a:ea typeface="Arial"/>
+                <a:cs typeface="Arial"/>
+              </a:rPr>
+              <a:t> </a:t>
+            </a:r>
+            <a:r>
+              <a:rPr sz="1200" b="1" i="0" dirty="0" err="1">
+                <a:solidFill>
+                  <a:srgbClr val="398D84"/>
+                </a:solidFill>
+                <a:latin typeface="Arial"/>
+                <a:ea typeface="Arial"/>
+                <a:cs typeface="Arial"/>
+              </a:rPr>
+              <a:t>на</a:t>
+            </a:r>
+            <a:r>
+              <a:rPr sz="1200" b="1" i="0" dirty="0">
+                <a:solidFill>
+                  <a:srgbClr val="398D84"/>
+                </a:solidFill>
+                <a:latin typeface="Arial"/>
+                <a:ea typeface="Arial"/>
+                <a:cs typeface="Arial"/>
+              </a:rPr>
+              <a:t> </a:t>
+            </a:r>
+            <a:r>
+              <a:rPr sz="1200" b="1" i="0" dirty="0" err="1">
+                <a:solidFill>
+                  <a:srgbClr val="398D84"/>
+                </a:solidFill>
+                <a:latin typeface="Arial"/>
+                <a:ea typeface="Arial"/>
+                <a:cs typeface="Arial"/>
+              </a:rPr>
+              <a:t>трошок</a:t>
+            </a:r>
+            <a:r>
+              <a:rPr sz="1200" b="1" i="0" dirty="0">
+                <a:solidFill>
+                  <a:srgbClr val="398D84"/>
+                </a:solidFill>
+                <a:latin typeface="Arial"/>
+                <a:ea typeface="Arial"/>
+                <a:cs typeface="Arial"/>
+              </a:rPr>
+              <a:t> </a:t>
+            </a:r>
+            <a:r>
+              <a:rPr sz="1200" b="1" i="0" dirty="0" err="1">
+                <a:solidFill>
+                  <a:srgbClr val="398D84"/>
+                </a:solidFill>
+                <a:latin typeface="Arial"/>
+                <a:ea typeface="Arial"/>
+                <a:cs typeface="Arial"/>
+              </a:rPr>
+              <a:t>има</a:t>
+            </a:r>
+            <a:r>
+              <a:rPr sz="1200" b="1" i="0" dirty="0">
+                <a:solidFill>
+                  <a:srgbClr val="398D84"/>
+                </a:solidFill>
+                <a:latin typeface="Arial"/>
+                <a:ea typeface="Arial"/>
+                <a:cs typeface="Arial"/>
+              </a:rPr>
+              <a:t> </a:t>
+            </a:r>
+            <a:r>
+              <a:rPr sz="1200" b="1" i="0" dirty="0" err="1">
+                <a:solidFill>
+                  <a:srgbClr val="398D84"/>
+                </a:solidFill>
+                <a:latin typeface="Arial"/>
+                <a:ea typeface="Arial"/>
+                <a:cs typeface="Arial"/>
+              </a:rPr>
+              <a:t>поголемо</a:t>
+            </a:r>
+            <a:r>
+              <a:rPr sz="1200" b="1" i="0" dirty="0">
+                <a:solidFill>
+                  <a:srgbClr val="398D84"/>
+                </a:solidFill>
+                <a:latin typeface="Arial"/>
+                <a:ea typeface="Arial"/>
+                <a:cs typeface="Arial"/>
+              </a:rPr>
+              <a:t> </a:t>
+            </a:r>
+            <a:r>
+              <a:rPr sz="1200" b="1" i="0" dirty="0" err="1">
+                <a:solidFill>
+                  <a:srgbClr val="398D84"/>
+                </a:solidFill>
+                <a:latin typeface="Arial"/>
+                <a:ea typeface="Arial"/>
+                <a:cs typeface="Arial"/>
+              </a:rPr>
+              <a:t>влијание</a:t>
+            </a:r>
+            <a:r>
+              <a:rPr sz="1200" b="1" i="0" dirty="0">
+                <a:solidFill>
+                  <a:srgbClr val="398D84"/>
+                </a:solidFill>
+                <a:latin typeface="Arial"/>
+                <a:ea typeface="Arial"/>
+                <a:cs typeface="Arial"/>
+              </a:rPr>
+              <a:t> </a:t>
+            </a:r>
+            <a:r>
+              <a:rPr sz="1200" b="1" i="0" dirty="0" err="1">
+                <a:solidFill>
+                  <a:srgbClr val="398D84"/>
+                </a:solidFill>
+                <a:latin typeface="Arial"/>
+                <a:ea typeface="Arial"/>
+                <a:cs typeface="Arial"/>
+              </a:rPr>
+              <a:t>од</a:t>
+            </a:r>
+            <a:r>
+              <a:rPr sz="1200" b="1" i="0" dirty="0">
+                <a:solidFill>
+                  <a:srgbClr val="398D84"/>
+                </a:solidFill>
+                <a:latin typeface="Arial"/>
+                <a:ea typeface="Arial"/>
+                <a:cs typeface="Arial"/>
+              </a:rPr>
+              <a:t> </a:t>
+            </a:r>
+            <a:r>
+              <a:rPr sz="1200" b="1" i="0" dirty="0" err="1">
+                <a:solidFill>
+                  <a:srgbClr val="398D84"/>
+                </a:solidFill>
+                <a:latin typeface="Arial"/>
+                <a:ea typeface="Arial"/>
+                <a:cs typeface="Arial"/>
+              </a:rPr>
+              <a:t>промени</a:t>
+            </a:r>
+            <a:r>
+              <a:rPr lang="mk-MK" sz="1200" b="1" dirty="0">
+                <a:solidFill>
+                  <a:srgbClr val="398D84"/>
+                </a:solidFill>
+                <a:latin typeface="Arial"/>
+                <a:ea typeface="Arial"/>
+                <a:cs typeface="Arial"/>
+              </a:rPr>
+              <a:t>те</a:t>
+            </a:r>
+            <a:r>
+              <a:rPr sz="1200" b="1" i="0" dirty="0">
+                <a:solidFill>
+                  <a:srgbClr val="398D84"/>
+                </a:solidFill>
+                <a:latin typeface="Arial"/>
+                <a:ea typeface="Arial"/>
+                <a:cs typeface="Arial"/>
+              </a:rPr>
+              <a:t> </a:t>
+            </a:r>
+            <a:r>
+              <a:rPr sz="1200" b="1" i="0" dirty="0" err="1">
+                <a:solidFill>
+                  <a:srgbClr val="398D84"/>
+                </a:solidFill>
+                <a:latin typeface="Arial"/>
+                <a:ea typeface="Arial"/>
+                <a:cs typeface="Arial"/>
+              </a:rPr>
+              <a:t>на</a:t>
+            </a:r>
+            <a:r>
+              <a:rPr sz="1200" b="1" i="0" dirty="0">
+                <a:solidFill>
+                  <a:srgbClr val="398D84"/>
+                </a:solidFill>
+                <a:latin typeface="Arial"/>
+                <a:ea typeface="Arial"/>
+                <a:cs typeface="Arial"/>
+              </a:rPr>
+              <a:t> </a:t>
+            </a:r>
+            <a:r>
+              <a:rPr sz="1200" b="1" i="0" dirty="0" err="1">
+                <a:solidFill>
+                  <a:srgbClr val="398D84"/>
+                </a:solidFill>
+                <a:latin typeface="Arial"/>
+                <a:ea typeface="Arial"/>
+                <a:cs typeface="Arial"/>
+              </a:rPr>
+              <a:t>λ</a:t>
+            </a:r>
+            <a:r>
+              <a:rPr sz="1200" b="1" i="0" dirty="0">
+                <a:solidFill>
+                  <a:srgbClr val="398D84"/>
+                </a:solidFill>
+                <a:latin typeface="Arial"/>
+                <a:ea typeface="Arial"/>
+                <a:cs typeface="Arial"/>
+              </a:rPr>
+              <a:t>.</a:t>
             </a:r>
           </a:p>
         </p:txBody>
@@ -9512,16 +11191,156 @@
               </a:defRPr>
             </a:pPr>
             <a:r>
-              <a:rPr sz="1350" b="0" i="0">
-                <a:solidFill>
-                  <a:srgbClr val="263746"/>
-                </a:solidFill>
-                <a:latin typeface="Arial"/>
-                <a:ea typeface="Arial"/>
-                <a:cs typeface="Arial"/>
-              </a:rPr>
-              <a:t>Hit — вратен е барем еден точен одговор</a:t>
-            </a:r>
+              <a:rPr sz="1350" b="1" i="0" dirty="0">
+                <a:solidFill>
+                  <a:srgbClr val="263746"/>
+                </a:solidFill>
+                <a:latin typeface="Arial"/>
+                <a:ea typeface="Arial"/>
+                <a:cs typeface="Arial"/>
+              </a:rPr>
+              <a:t>Hit</a:t>
+            </a:r>
+            <a:r>
+              <a:rPr sz="1350" b="0" i="0" dirty="0">
+                <a:solidFill>
+                  <a:srgbClr val="263746"/>
+                </a:solidFill>
+                <a:latin typeface="Arial"/>
+                <a:ea typeface="Arial"/>
+                <a:cs typeface="Arial"/>
+              </a:rPr>
+              <a:t> — </a:t>
+            </a:r>
+            <a:r>
+              <a:rPr sz="1350" b="0" i="0" dirty="0" err="1">
+                <a:solidFill>
+                  <a:srgbClr val="263746"/>
+                </a:solidFill>
+                <a:latin typeface="Arial"/>
+                <a:ea typeface="Arial"/>
+                <a:cs typeface="Arial"/>
+              </a:rPr>
+              <a:t>вратен</a:t>
+            </a:r>
+            <a:r>
+              <a:rPr sz="1350" b="0" i="0" dirty="0">
+                <a:solidFill>
+                  <a:srgbClr val="263746"/>
+                </a:solidFill>
+                <a:latin typeface="Arial"/>
+                <a:ea typeface="Arial"/>
+                <a:cs typeface="Arial"/>
+              </a:rPr>
+              <a:t> </a:t>
+            </a:r>
+            <a:r>
+              <a:rPr sz="1350" b="0" i="0" dirty="0" err="1">
+                <a:solidFill>
+                  <a:srgbClr val="263746"/>
+                </a:solidFill>
+                <a:latin typeface="Arial"/>
+                <a:ea typeface="Arial"/>
+                <a:cs typeface="Arial"/>
+              </a:rPr>
+              <a:t>е</a:t>
+            </a:r>
+            <a:r>
+              <a:rPr sz="1350" b="0" i="0" dirty="0">
+                <a:solidFill>
+                  <a:srgbClr val="263746"/>
+                </a:solidFill>
+                <a:latin typeface="Arial"/>
+                <a:ea typeface="Arial"/>
+                <a:cs typeface="Arial"/>
+              </a:rPr>
+              <a:t> </a:t>
+            </a:r>
+            <a:r>
+              <a:rPr sz="1350" b="0" i="0" dirty="0" err="1">
+                <a:solidFill>
+                  <a:srgbClr val="263746"/>
+                </a:solidFill>
+                <a:latin typeface="Arial"/>
+                <a:ea typeface="Arial"/>
+                <a:cs typeface="Arial"/>
+              </a:rPr>
+              <a:t>барем</a:t>
+            </a:r>
+            <a:r>
+              <a:rPr sz="1350" b="0" i="0" dirty="0">
+                <a:solidFill>
+                  <a:srgbClr val="263746"/>
+                </a:solidFill>
+                <a:latin typeface="Arial"/>
+                <a:ea typeface="Arial"/>
+                <a:cs typeface="Arial"/>
+              </a:rPr>
+              <a:t> </a:t>
+            </a:r>
+            <a:r>
+              <a:rPr sz="1350" b="0" i="0" dirty="0" err="1">
+                <a:solidFill>
+                  <a:srgbClr val="263746"/>
+                </a:solidFill>
+                <a:latin typeface="Arial"/>
+                <a:ea typeface="Arial"/>
+                <a:cs typeface="Arial"/>
+              </a:rPr>
+              <a:t>еден</a:t>
+            </a:r>
+            <a:r>
+              <a:rPr sz="1350" b="0" i="0" dirty="0">
+                <a:solidFill>
+                  <a:srgbClr val="263746"/>
+                </a:solidFill>
+                <a:latin typeface="Arial"/>
+                <a:ea typeface="Arial"/>
+                <a:cs typeface="Arial"/>
+              </a:rPr>
+              <a:t> </a:t>
+            </a:r>
+            <a:r>
+              <a:rPr sz="1350" b="0" i="0" dirty="0" err="1">
+                <a:solidFill>
+                  <a:srgbClr val="263746"/>
+                </a:solidFill>
+                <a:latin typeface="Arial"/>
+                <a:ea typeface="Arial"/>
+                <a:cs typeface="Arial"/>
+              </a:rPr>
+              <a:t>точен</a:t>
+            </a:r>
+            <a:r>
+              <a:rPr sz="1350" b="0" i="0" dirty="0">
+                <a:solidFill>
+                  <a:srgbClr val="263746"/>
+                </a:solidFill>
+                <a:latin typeface="Arial"/>
+                <a:ea typeface="Arial"/>
+                <a:cs typeface="Arial"/>
+              </a:rPr>
+              <a:t> </a:t>
+            </a:r>
+            <a:r>
+              <a:rPr sz="1350" b="0" i="0" dirty="0" err="1">
+                <a:solidFill>
+                  <a:srgbClr val="263746"/>
+                </a:solidFill>
+                <a:latin typeface="Arial"/>
+                <a:ea typeface="Arial"/>
+                <a:cs typeface="Arial"/>
+              </a:rPr>
+              <a:t>одговор</a:t>
+            </a:r>
+            <a:endParaRPr sz="1350" b="0" i="0" dirty="0">
+              <a:solidFill>
+                <a:srgbClr val="263746"/>
+              </a:solidFill>
+              <a:latin typeface="Arial"/>
+              <a:ea typeface="Arial"/>
+              <a:cs typeface="Arial"/>
+            </a:endParaRPr>
           </a:p>
         </p:txBody>
       </p:sp>
@@ -9608,16 +11427,112 @@
               </a:defRPr>
             </a:pPr>
             <a:r>
-              <a:rPr sz="1350" b="0" i="0">
-                <a:solidFill>
-                  <a:srgbClr val="263746"/>
-                </a:solidFill>
-                <a:latin typeface="Arial"/>
-                <a:ea typeface="Arial"/>
-                <a:cs typeface="Arial"/>
-              </a:rPr>
-              <a:t>ExactMatch — целосно совпаѓање на множествата</a:t>
-            </a:r>
+              <a:rPr sz="1350" b="1" i="0" dirty="0" err="1">
+                <a:solidFill>
+                  <a:srgbClr val="263746"/>
+                </a:solidFill>
+                <a:latin typeface="Arial"/>
+                <a:ea typeface="Arial"/>
+                <a:cs typeface="Arial"/>
+              </a:rPr>
+              <a:t>ExactMatch</a:t>
+            </a:r>
+            <a:r>
+              <a:rPr sz="1350" b="0" i="0" dirty="0">
+                <a:solidFill>
+                  <a:srgbClr val="263746"/>
+                </a:solidFill>
+                <a:latin typeface="Arial"/>
+                <a:ea typeface="Arial"/>
+                <a:cs typeface="Arial"/>
+              </a:rPr>
+              <a:t> — </a:t>
+            </a:r>
+            <a:r>
+              <a:rPr sz="1350" b="0" i="0" dirty="0" err="1">
+                <a:solidFill>
+                  <a:srgbClr val="263746"/>
+                </a:solidFill>
+                <a:latin typeface="Arial"/>
+                <a:ea typeface="Arial"/>
+                <a:cs typeface="Arial"/>
+              </a:rPr>
+              <a:t>целосно</a:t>
+            </a:r>
+            <a:r>
+              <a:rPr sz="1350" b="0" i="0" dirty="0">
+                <a:solidFill>
+                  <a:srgbClr val="263746"/>
+                </a:solidFill>
+                <a:latin typeface="Arial"/>
+                <a:ea typeface="Arial"/>
+                <a:cs typeface="Arial"/>
+              </a:rPr>
+              <a:t> </a:t>
+            </a:r>
+            <a:r>
+              <a:rPr sz="1350" b="0" i="0" dirty="0" err="1">
+                <a:solidFill>
+                  <a:srgbClr val="263746"/>
+                </a:solidFill>
+                <a:latin typeface="Arial"/>
+                <a:ea typeface="Arial"/>
+                <a:cs typeface="Arial"/>
+              </a:rPr>
+              <a:t>совпаѓање</a:t>
+            </a:r>
+            <a:r>
+              <a:rPr sz="1350" b="0" i="0" dirty="0">
+                <a:solidFill>
+                  <a:srgbClr val="263746"/>
+                </a:solidFill>
+                <a:latin typeface="Arial"/>
+                <a:ea typeface="Arial"/>
+                <a:cs typeface="Arial"/>
+              </a:rPr>
+              <a:t> </a:t>
+            </a:r>
+            <a:r>
+              <a:rPr sz="1350" b="0" i="0" dirty="0" err="1">
+                <a:solidFill>
+                  <a:srgbClr val="263746"/>
+                </a:solidFill>
+                <a:latin typeface="Arial"/>
+                <a:ea typeface="Arial"/>
+                <a:cs typeface="Arial"/>
+              </a:rPr>
+              <a:t>на</a:t>
+            </a:r>
+            <a:r>
+              <a:rPr sz="1350" b="0" i="0" dirty="0">
+                <a:solidFill>
+                  <a:srgbClr val="263746"/>
+                </a:solidFill>
+                <a:latin typeface="Arial"/>
+                <a:ea typeface="Arial"/>
+                <a:cs typeface="Arial"/>
+              </a:rPr>
+              <a:t> </a:t>
+            </a:r>
+            <a:r>
+              <a:rPr sz="1350" b="0" i="0" dirty="0" err="1">
+                <a:solidFill>
+                  <a:srgbClr val="263746"/>
+                </a:solidFill>
+                <a:latin typeface="Arial"/>
+                <a:ea typeface="Arial"/>
+                <a:cs typeface="Arial"/>
+              </a:rPr>
+              <a:t>множествата</a:t>
+            </a:r>
+            <a:endParaRPr sz="1350" b="0" i="0" dirty="0">
+              <a:solidFill>
+                <a:srgbClr val="263746"/>
+              </a:solidFill>
+              <a:latin typeface="Arial"/>
+              <a:ea typeface="Arial"/>
+              <a:cs typeface="Arial"/>
+            </a:endParaRPr>
           </a:p>
         </p:txBody>
       </p:sp>
@@ -9704,16 +11619,112 @@
               </a:defRPr>
             </a:pPr>
             <a:r>
-              <a:rPr sz="1350" b="0" i="0">
-                <a:solidFill>
-                  <a:srgbClr val="263746"/>
-                </a:solidFill>
-                <a:latin typeface="Arial"/>
-                <a:ea typeface="Arial"/>
-                <a:cs typeface="Arial"/>
-              </a:rPr>
-              <a:t>Precision · Recall · F1 — квалитет на генерираното множество</a:t>
-            </a:r>
+              <a:rPr sz="1350" b="1" i="0" dirty="0">
+                <a:solidFill>
+                  <a:srgbClr val="263746"/>
+                </a:solidFill>
+                <a:latin typeface="Arial"/>
+                <a:ea typeface="Arial"/>
+                <a:cs typeface="Arial"/>
+              </a:rPr>
+              <a:t>Precision · Recall · F1</a:t>
+            </a:r>
+            <a:r>
+              <a:rPr sz="1350" b="0" i="0" dirty="0">
+                <a:solidFill>
+                  <a:srgbClr val="263746"/>
+                </a:solidFill>
+                <a:latin typeface="Arial"/>
+                <a:ea typeface="Arial"/>
+                <a:cs typeface="Arial"/>
+              </a:rPr>
+              <a:t> — </a:t>
+            </a:r>
+            <a:r>
+              <a:rPr sz="1350" b="0" i="0" dirty="0" err="1">
+                <a:solidFill>
+                  <a:srgbClr val="263746"/>
+                </a:solidFill>
+                <a:latin typeface="Arial"/>
+                <a:ea typeface="Arial"/>
+                <a:cs typeface="Arial"/>
+              </a:rPr>
+              <a:t>квалитет</a:t>
+            </a:r>
+            <a:r>
+              <a:rPr sz="1350" b="0" i="0" dirty="0">
+                <a:solidFill>
+                  <a:srgbClr val="263746"/>
+                </a:solidFill>
+                <a:latin typeface="Arial"/>
+                <a:ea typeface="Arial"/>
+                <a:cs typeface="Arial"/>
+              </a:rPr>
+              <a:t> </a:t>
+            </a:r>
+            <a:r>
+              <a:rPr sz="1350" b="0" i="0" dirty="0" err="1">
+                <a:solidFill>
+                  <a:srgbClr val="263746"/>
+                </a:solidFill>
+                <a:latin typeface="Arial"/>
+                <a:ea typeface="Arial"/>
+                <a:cs typeface="Arial"/>
+              </a:rPr>
+              <a:t>на</a:t>
+            </a:r>
+            <a:r>
+              <a:rPr sz="1350" b="0" i="0" dirty="0">
+                <a:solidFill>
+                  <a:srgbClr val="263746"/>
+                </a:solidFill>
+                <a:latin typeface="Arial"/>
+                <a:ea typeface="Arial"/>
+                <a:cs typeface="Arial"/>
+              </a:rPr>
+              <a:t> </a:t>
+            </a:r>
+            <a:r>
+              <a:rPr sz="1350" b="0" i="0" dirty="0" err="1">
+                <a:solidFill>
+                  <a:srgbClr val="263746"/>
+                </a:solidFill>
+                <a:latin typeface="Arial"/>
+                <a:ea typeface="Arial"/>
+                <a:cs typeface="Arial"/>
+              </a:rPr>
+              <a:t>генерираното</a:t>
+            </a:r>
+            <a:r>
+              <a:rPr sz="1350" b="0" i="0" dirty="0">
+                <a:solidFill>
+                  <a:srgbClr val="263746"/>
+                </a:solidFill>
+                <a:latin typeface="Arial"/>
+                <a:ea typeface="Arial"/>
+                <a:cs typeface="Arial"/>
+              </a:rPr>
+              <a:t> </a:t>
+            </a:r>
+            <a:r>
+              <a:rPr sz="1350" b="0" i="0" dirty="0" err="1">
+                <a:solidFill>
+                  <a:srgbClr val="263746"/>
+                </a:solidFill>
+                <a:latin typeface="Arial"/>
+                <a:ea typeface="Arial"/>
+                <a:cs typeface="Arial"/>
+              </a:rPr>
+              <a:t>множество</a:t>
+            </a:r>
+            <a:endParaRPr sz="1350" b="0" i="0" dirty="0">
+              <a:solidFill>
+                <a:srgbClr val="263746"/>
+              </a:solidFill>
+              <a:latin typeface="Arial"/>
+              <a:ea typeface="Arial"/>
+              <a:cs typeface="Arial"/>
+            </a:endParaRPr>
           </a:p>
         </p:txBody>
       </p:sp>
@@ -10856,7 +12867,7 @@
               </a:defRPr>
             </a:pPr>
             <a:r>
-              <a:rPr sz="900" b="0" i="0">
+              <a:rPr sz="900" b="0" i="0" dirty="0" err="1">
                 <a:solidFill>
                   <a:srgbClr val="617080"/>
                 </a:solidFill>
@@ -10864,7 +12875,18 @@
                 <a:ea typeface="Arial"/>
                 <a:cs typeface="Arial"/>
               </a:rPr>
-              <a:t>токени · DeepSeek / GPT</a:t>
+              <a:t>токени</a:t>
+            </a:r>
+            <a:r>
+              <a:rPr sz="900" b="0" i="0" dirty="0">
+                <a:solidFill>
+                  <a:srgbClr val="617080"/>
+                </a:solidFill>
+                <a:latin typeface="Arial"/>
+                <a:ea typeface="Arial"/>
+                <a:cs typeface="Arial"/>
+              </a:rPr>
+              <a:t> · DeepSeek / GPT</a:t>
             </a:r>
           </a:p>
         </p:txBody>
@@ -11304,7 +13326,7 @@
               </a:defRPr>
             </a:pPr>
             <a:r>
-              <a:rPr sz="900" b="0" i="0">
+              <a:rPr sz="900" b="0" i="0" dirty="0" err="1">
                 <a:solidFill>
                   <a:srgbClr val="617080"/>
                 </a:solidFill>
@@ -11312,8 +13334,38 @@
                 <a:ea typeface="Arial"/>
                 <a:cs typeface="Arial"/>
               </a:rPr>
-              <a:t>токени · 78–80% помалку</a:t>
-            </a:r>
+              <a:t>токени</a:t>
+            </a:r>
+            <a:r>
+              <a:rPr sz="900" b="0" i="0" dirty="0">
+                <a:solidFill>
+                  <a:srgbClr val="617080"/>
+                </a:solidFill>
+                <a:latin typeface="Arial"/>
+                <a:ea typeface="Arial"/>
+                <a:cs typeface="Arial"/>
+              </a:rPr>
+              <a:t> · 78–80% </a:t>
+            </a:r>
+            <a:r>
+              <a:rPr sz="900" b="0" i="0" dirty="0" err="1">
+                <a:solidFill>
+                  <a:srgbClr val="617080"/>
+                </a:solidFill>
+                <a:latin typeface="Arial"/>
+                <a:ea typeface="Arial"/>
+                <a:cs typeface="Arial"/>
+              </a:rPr>
+              <a:t>помалку</a:t>
+            </a:r>
+            <a:endParaRPr sz="900" b="0" i="0" dirty="0">
+              <a:solidFill>
+                <a:srgbClr val="617080"/>
+              </a:solidFill>
+              <a:latin typeface="Arial"/>
+              <a:ea typeface="Arial"/>
+              <a:cs typeface="Arial"/>
+            </a:endParaRPr>
           </a:p>
         </p:txBody>
       </p:sp>
@@ -11634,7 +13686,7 @@
               </a:defRPr>
             </a:pPr>
             <a:r>
-              <a:rPr sz="1050" b="0" i="0">
+              <a:rPr sz="1050" b="0" i="0" dirty="0" err="1">
                 <a:solidFill>
                   <a:srgbClr val="617080"/>
                 </a:solidFill>
@@ -11644,6 +13696,45 @@
               </a:rPr>
               <a:t>RetrievalGoldCoverage</a:t>
             </a:r>
+            <a:endParaRPr lang="mk-MK" sz="1050" b="0" i="0" dirty="0">
+              <a:solidFill>
+                <a:srgbClr val="617080"/>
+              </a:solidFill>
+              <a:latin typeface="Arial"/>
+              <a:ea typeface="Arial"/>
+              <a:cs typeface="Arial"/>
+            </a:endParaRPr>
+          </a:p>
+          <a:p>
+            <a:pPr algn="ctr">
+              <a:defRPr sz="1050" b="0" i="0">
+                <a:solidFill>
+                  <a:srgbClr val="617080"/>
+                </a:solidFill>
+                <a:latin typeface="Arial"/>
+                <a:ea typeface="Arial"/>
+                <a:cs typeface="Arial"/>
+              </a:defRPr>
+            </a:pPr>
+            <a:r>
+              <a:rPr lang="en-US" sz="1050" b="0" i="0" dirty="0" err="1">
+                <a:solidFill>
+                  <a:srgbClr val="617080"/>
+                </a:solidFill>
+                <a:latin typeface="Arial"/>
+                <a:ea typeface="Arial"/>
+                <a:cs typeface="Arial"/>
+              </a:rPr>
+              <a:t>NBFNet</a:t>
+            </a:r>
+            <a:endParaRPr sz="1050" b="0" i="0" dirty="0">
+              <a:solidFill>
+                <a:srgbClr val="617080"/>
+              </a:solidFill>
+              <a:latin typeface="Arial"/>
+              <a:ea typeface="Arial"/>
+              <a:cs typeface="Arial"/>
+            </a:endParaRPr>
           </a:p>
         </p:txBody>
       </p:sp>
@@ -11692,7 +13783,7 @@
               </a:defRPr>
             </a:pPr>
             <a:r>
-              <a:rPr sz="2100" b="1" i="0">
+              <a:rPr sz="2100" b="1" i="0" dirty="0">
                 <a:solidFill>
                   <a:srgbClr val="398D84"/>
                 </a:solidFill>
@@ -11702,6 +13793,47 @@
               </a:rPr>
               <a:t>0,888</a:t>
             </a:r>
+            <a:r>
+              <a:rPr lang="mk-MK" sz="2100" b="1" i="0" dirty="0">
+                <a:solidFill>
+                  <a:srgbClr val="398D84"/>
+                </a:solidFill>
+                <a:latin typeface="Arial"/>
+                <a:ea typeface="Arial"/>
+                <a:cs typeface="Arial"/>
+              </a:rPr>
+              <a:t> / </a:t>
+            </a:r>
+            <a:r>
+              <a:rPr lang="en-US" sz="2100" b="1" dirty="0">
+                <a:solidFill>
+                  <a:srgbClr val="398D84"/>
+                </a:solidFill>
+                <a:latin typeface="Arial"/>
+                <a:ea typeface="Arial"/>
+                <a:cs typeface="Arial"/>
+              </a:rPr>
+              <a:t>0,88</a:t>
+            </a:r>
+            <a:r>
+              <a:rPr lang="mk-MK" sz="2100" b="1" dirty="0">
+                <a:solidFill>
+                  <a:srgbClr val="398D84"/>
+                </a:solidFill>
+                <a:latin typeface="Arial"/>
+                <a:ea typeface="Arial"/>
+                <a:cs typeface="Arial"/>
+              </a:rPr>
+              <a:t>1</a:t>
+            </a:r>
+            <a:endParaRPr sz="2100" b="1" i="0" dirty="0">
+              <a:solidFill>
+                <a:srgbClr val="398D84"/>
+              </a:solidFill>
+              <a:latin typeface="Arial"/>
+              <a:ea typeface="Arial"/>
+              <a:cs typeface="Arial"/>
+            </a:endParaRPr>
           </a:p>
         </p:txBody>
       </p:sp>
@@ -11750,7 +13882,7 @@
               </a:defRPr>
             </a:pPr>
             <a:r>
-              <a:rPr sz="1050" b="0" i="0">
+              <a:rPr sz="1050" b="0" i="0" dirty="0" err="1">
                 <a:solidFill>
                   <a:srgbClr val="617080"/>
                 </a:solidFill>
@@ -11760,6 +13892,14 @@
               </a:rPr>
               <a:t>ContextGoldCoverage</a:t>
             </a:r>
+            <a:endParaRPr sz="1050" b="0" i="0" dirty="0">
+              <a:solidFill>
+                <a:srgbClr val="617080"/>
+              </a:solidFill>
+              <a:latin typeface="Arial"/>
+              <a:ea typeface="Arial"/>
+              <a:cs typeface="Arial"/>
+            </a:endParaRPr>
           </a:p>
           <a:p>
             <a:pPr algn="ctr">
@@ -11773,7 +13913,7 @@
               </a:defRPr>
             </a:pPr>
             <a:r>
-              <a:rPr sz="1050" b="0" i="0">
+              <a:rPr sz="1050" b="0" i="0" dirty="0" err="1">
                 <a:solidFill>
                   <a:srgbClr val="617080"/>
                 </a:solidFill>
@@ -11781,8 +13921,82 @@
                 <a:ea typeface="Arial"/>
                 <a:cs typeface="Arial"/>
               </a:rPr>
-              <a:t>најкратки патеки</a:t>
-            </a:r>
+              <a:t>најкратки</a:t>
+            </a:r>
+            <a:r>
+              <a:rPr sz="1050" b="0" i="0" dirty="0">
+                <a:solidFill>
+                  <a:srgbClr val="617080"/>
+                </a:solidFill>
+                <a:latin typeface="Arial"/>
+                <a:ea typeface="Arial"/>
+                <a:cs typeface="Arial"/>
+              </a:rPr>
+              <a:t> </a:t>
+            </a:r>
+            <a:r>
+              <a:rPr sz="1050" b="0" i="0" dirty="0" err="1">
+                <a:solidFill>
+                  <a:srgbClr val="617080"/>
+                </a:solidFill>
+                <a:latin typeface="Arial"/>
+                <a:ea typeface="Arial"/>
+                <a:cs typeface="Arial"/>
+              </a:rPr>
+              <a:t>патеки</a:t>
+            </a:r>
+            <a:r>
+              <a:rPr lang="mk-MK" sz="1050" b="0" i="0" dirty="0">
+                <a:solidFill>
+                  <a:srgbClr val="617080"/>
+                </a:solidFill>
+                <a:latin typeface="Arial"/>
+                <a:ea typeface="Arial"/>
+                <a:cs typeface="Arial"/>
+              </a:rPr>
+              <a:t> </a:t>
+            </a:r>
+            <a:r>
+              <a:rPr lang="en-US" sz="1050" dirty="0">
+                <a:solidFill>
+                  <a:srgbClr val="617080"/>
+                </a:solidFill>
+                <a:latin typeface="Arial"/>
+                <a:ea typeface="Arial"/>
+                <a:cs typeface="Arial"/>
+              </a:rPr>
+              <a:t>·</a:t>
+            </a:r>
+            <a:r>
+              <a:rPr lang="mk-MK" sz="1050" dirty="0">
+                <a:solidFill>
+                  <a:srgbClr val="617080"/>
+                </a:solidFill>
+                <a:latin typeface="Arial"/>
+                <a:ea typeface="Arial"/>
+                <a:cs typeface="Arial"/>
+              </a:rPr>
+              <a:t> </a:t>
+            </a:r>
+            <a:r>
+              <a:rPr lang="en-US" sz="1050" dirty="0">
+                <a:solidFill>
+                  <a:srgbClr val="617080"/>
+                </a:solidFill>
+                <a:latin typeface="Arial"/>
+                <a:ea typeface="Arial"/>
+                <a:cs typeface="Arial"/>
+              </a:rPr>
+              <a:t>PCST</a:t>
+            </a:r>
+            <a:endParaRPr sz="1050" b="0" i="0" dirty="0">
+              <a:solidFill>
+                <a:srgbClr val="617080"/>
+              </a:solidFill>
+              <a:latin typeface="Arial"/>
+              <a:ea typeface="Arial"/>
+              <a:cs typeface="Arial"/>
+            </a:endParaRPr>
           </a:p>
         </p:txBody>
       </p:sp>
@@ -11831,7 +14045,7 @@
               </a:defRPr>
             </a:pPr>
             <a:r>
-              <a:rPr sz="1875" b="1" i="0">
+              <a:rPr sz="1875" b="1" i="0" dirty="0">
                 <a:solidFill>
                   <a:srgbClr val="8064A2"/>
                 </a:solidFill>
@@ -11889,7 +14103,7 @@
               </a:defRPr>
             </a:pPr>
             <a:r>
-              <a:rPr sz="1050" b="0" i="0">
+              <a:rPr sz="1050" b="0" i="0" dirty="0">
                 <a:solidFill>
                   <a:srgbClr val="617080"/>
                 </a:solidFill>
@@ -11912,7 +14126,7 @@
               </a:defRPr>
             </a:pPr>
             <a:r>
-              <a:rPr sz="1050" b="0" i="0">
+              <a:rPr sz="1050" b="0" i="0" dirty="0" err="1">
                 <a:solidFill>
                   <a:srgbClr val="617080"/>
                 </a:solidFill>
@@ -11920,8 +14134,38 @@
                 <a:ea typeface="Arial"/>
                 <a:cs typeface="Arial"/>
               </a:rPr>
-              <a:t>најкратки патеки</a:t>
-            </a:r>
+              <a:t>најкратки</a:t>
+            </a:r>
+            <a:r>
+              <a:rPr sz="1050" b="0" i="0" dirty="0">
+                <a:solidFill>
+                  <a:srgbClr val="617080"/>
+                </a:solidFill>
+                <a:latin typeface="Arial"/>
+                <a:ea typeface="Arial"/>
+                <a:cs typeface="Arial"/>
+              </a:rPr>
+              <a:t> </a:t>
+            </a:r>
+            <a:r>
+              <a:rPr sz="1050" b="0" i="0" dirty="0" err="1">
+                <a:solidFill>
+                  <a:srgbClr val="617080"/>
+                </a:solidFill>
+                <a:latin typeface="Arial"/>
+                <a:ea typeface="Arial"/>
+                <a:cs typeface="Arial"/>
+              </a:rPr>
+              <a:t>патеки</a:t>
+            </a:r>
+            <a:endParaRPr sz="1050" b="0" i="0" dirty="0">
+              <a:solidFill>
+                <a:srgbClr val="617080"/>
+              </a:solidFill>
+              <a:latin typeface="Arial"/>
+              <a:ea typeface="Arial"/>
+              <a:cs typeface="Arial"/>
+            </a:endParaRPr>
           </a:p>
         </p:txBody>
       </p:sp>
@@ -12028,7 +14272,7 @@
               </a:defRPr>
             </a:pPr>
             <a:r>
-              <a:rPr sz="1050" b="0" i="0">
+              <a:rPr sz="1050" b="0" i="0" dirty="0">
                 <a:solidFill>
                   <a:srgbClr val="617080"/>
                 </a:solidFill>
@@ -12051,7 +14295,7 @@
               </a:defRPr>
             </a:pPr>
             <a:r>
-              <a:rPr sz="1050" b="0" i="0">
+              <a:rPr sz="1050" b="0" i="0" dirty="0" err="1">
                 <a:solidFill>
                   <a:srgbClr val="617080"/>
                 </a:solidFill>
@@ -12059,7 +14303,18 @@
                 <a:ea typeface="Arial"/>
                 <a:cs typeface="Arial"/>
               </a:rPr>
-              <a:t>семантички PCST</a:t>
+              <a:t>семантички</a:t>
+            </a:r>
+            <a:r>
+              <a:rPr sz="1050" b="0" i="0" dirty="0">
+                <a:solidFill>
+                  <a:srgbClr val="617080"/>
+                </a:solidFill>
+                <a:latin typeface="Arial"/>
+                <a:ea typeface="Arial"/>
+                <a:cs typeface="Arial"/>
+              </a:rPr>
+              <a:t> PCST</a:t>
             </a:r>
           </a:p>
         </p:txBody>
@@ -12109,15 +14364,389 @@
               </a:defRPr>
             </a:pPr>
             <a:r>
-              <a:rPr sz="1350" b="1" i="0">
-                <a:solidFill>
-                  <a:srgbClr val="263746"/>
-                </a:solidFill>
-                <a:latin typeface="Arial"/>
-                <a:ea typeface="Arial"/>
-                <a:cs typeface="Arial"/>
-              </a:rPr>
-              <a:t>Присуството на точниот ентитет не е доволно — потребни се јасни релациски тројки што го поврзуваат со прашањето.</a:t>
+              <a:rPr sz="1350" b="1" i="0" dirty="0" err="1">
+                <a:solidFill>
+                  <a:srgbClr val="263746"/>
+                </a:solidFill>
+                <a:latin typeface="Arial"/>
+                <a:ea typeface="Arial"/>
+                <a:cs typeface="Arial"/>
+              </a:rPr>
+              <a:t>Присуството</a:t>
+            </a:r>
+            <a:r>
+              <a:rPr sz="1350" b="1" i="0" dirty="0">
+                <a:solidFill>
+                  <a:srgbClr val="263746"/>
+                </a:solidFill>
+                <a:latin typeface="Arial"/>
+                <a:ea typeface="Arial"/>
+                <a:cs typeface="Arial"/>
+              </a:rPr>
+              <a:t> </a:t>
+            </a:r>
+            <a:r>
+              <a:rPr sz="1350" b="1" i="0" dirty="0" err="1">
+                <a:solidFill>
+                  <a:srgbClr val="263746"/>
+                </a:solidFill>
+                <a:latin typeface="Arial"/>
+                <a:ea typeface="Arial"/>
+                <a:cs typeface="Arial"/>
+              </a:rPr>
+              <a:t>на</a:t>
+            </a:r>
+            <a:r>
+              <a:rPr sz="1350" b="1" i="0" dirty="0">
+                <a:solidFill>
+                  <a:srgbClr val="263746"/>
+                </a:solidFill>
+                <a:latin typeface="Arial"/>
+                <a:ea typeface="Arial"/>
+                <a:cs typeface="Arial"/>
+              </a:rPr>
+              <a:t> </a:t>
+            </a:r>
+            <a:r>
+              <a:rPr sz="1350" b="1" i="0" dirty="0" err="1">
+                <a:solidFill>
+                  <a:srgbClr val="263746"/>
+                </a:solidFill>
+                <a:latin typeface="Arial"/>
+                <a:ea typeface="Arial"/>
+                <a:cs typeface="Arial"/>
+              </a:rPr>
+              <a:t>точниот</a:t>
+            </a:r>
+            <a:r>
+              <a:rPr sz="1350" b="1" i="0" dirty="0">
+                <a:solidFill>
+                  <a:srgbClr val="263746"/>
+                </a:solidFill>
+                <a:latin typeface="Arial"/>
+                <a:ea typeface="Arial"/>
+                <a:cs typeface="Arial"/>
+              </a:rPr>
+              <a:t> </a:t>
+            </a:r>
+            <a:r>
+              <a:rPr sz="1350" b="1" i="0" dirty="0" err="1">
+                <a:solidFill>
+                  <a:srgbClr val="263746"/>
+                </a:solidFill>
+                <a:latin typeface="Arial"/>
+                <a:ea typeface="Arial"/>
+                <a:cs typeface="Arial"/>
+              </a:rPr>
+              <a:t>ентитет</a:t>
+            </a:r>
+            <a:r>
+              <a:rPr sz="1350" b="1" i="0" dirty="0">
+                <a:solidFill>
+                  <a:srgbClr val="263746"/>
+                </a:solidFill>
+                <a:latin typeface="Arial"/>
+                <a:ea typeface="Arial"/>
+                <a:cs typeface="Arial"/>
+              </a:rPr>
+              <a:t> </a:t>
+            </a:r>
+            <a:r>
+              <a:rPr sz="1350" b="1" i="0" dirty="0" err="1">
+                <a:solidFill>
+                  <a:srgbClr val="263746"/>
+                </a:solidFill>
+                <a:latin typeface="Arial"/>
+                <a:ea typeface="Arial"/>
+                <a:cs typeface="Arial"/>
+              </a:rPr>
+              <a:t>не</a:t>
+            </a:r>
+            <a:r>
+              <a:rPr sz="1350" b="1" i="0" dirty="0">
+                <a:solidFill>
+                  <a:srgbClr val="263746"/>
+                </a:solidFill>
+                <a:latin typeface="Arial"/>
+                <a:ea typeface="Arial"/>
+                <a:cs typeface="Arial"/>
+              </a:rPr>
+              <a:t> </a:t>
+            </a:r>
+            <a:r>
+              <a:rPr sz="1350" b="1" i="0" dirty="0" err="1">
+                <a:solidFill>
+                  <a:srgbClr val="263746"/>
+                </a:solidFill>
+                <a:latin typeface="Arial"/>
+                <a:ea typeface="Arial"/>
+                <a:cs typeface="Arial"/>
+              </a:rPr>
+              <a:t>е</a:t>
+            </a:r>
+            <a:r>
+              <a:rPr sz="1350" b="1" i="0" dirty="0">
+                <a:solidFill>
+                  <a:srgbClr val="263746"/>
+                </a:solidFill>
+                <a:latin typeface="Arial"/>
+                <a:ea typeface="Arial"/>
+                <a:cs typeface="Arial"/>
+              </a:rPr>
+              <a:t> </a:t>
+            </a:r>
+            <a:r>
+              <a:rPr sz="1350" b="1" i="0" dirty="0" err="1">
+                <a:solidFill>
+                  <a:srgbClr val="263746"/>
+                </a:solidFill>
+                <a:latin typeface="Arial"/>
+                <a:ea typeface="Arial"/>
+                <a:cs typeface="Arial"/>
+              </a:rPr>
+              <a:t>доволно</a:t>
+            </a:r>
+            <a:r>
+              <a:rPr sz="1350" b="1" i="0" dirty="0">
+                <a:solidFill>
+                  <a:srgbClr val="263746"/>
+                </a:solidFill>
+                <a:latin typeface="Arial"/>
+                <a:ea typeface="Arial"/>
+                <a:cs typeface="Arial"/>
+              </a:rPr>
+              <a:t> </a:t>
+            </a:r>
+            <a:r>
+              <a:rPr lang="en-US" sz="1350" b="1" i="0" dirty="0">
+                <a:solidFill>
+                  <a:srgbClr val="263746"/>
+                </a:solidFill>
+                <a:latin typeface="Arial"/>
+                <a:ea typeface="Arial"/>
+                <a:cs typeface="Arial"/>
+              </a:rPr>
+              <a:t>— </a:t>
+            </a:r>
+            <a:r>
+              <a:rPr sz="1350" b="1" i="0" dirty="0" err="1">
+                <a:solidFill>
+                  <a:srgbClr val="263746"/>
+                </a:solidFill>
+                <a:latin typeface="Arial"/>
+                <a:ea typeface="Arial"/>
+                <a:cs typeface="Arial"/>
+              </a:rPr>
+              <a:t>потребни</a:t>
+            </a:r>
+            <a:r>
+              <a:rPr sz="1350" b="1" i="0" dirty="0">
+                <a:solidFill>
+                  <a:srgbClr val="263746"/>
+                </a:solidFill>
+                <a:latin typeface="Arial"/>
+                <a:ea typeface="Arial"/>
+                <a:cs typeface="Arial"/>
+              </a:rPr>
+              <a:t> </a:t>
+            </a:r>
+            <a:r>
+              <a:rPr sz="1350" b="1" i="0" dirty="0" err="1">
+                <a:solidFill>
+                  <a:srgbClr val="263746"/>
+                </a:solidFill>
+                <a:latin typeface="Arial"/>
+                <a:ea typeface="Arial"/>
+                <a:cs typeface="Arial"/>
+              </a:rPr>
+              <a:t>се</a:t>
+            </a:r>
+            <a:r>
+              <a:rPr sz="1350" b="1" i="0" dirty="0">
+                <a:solidFill>
+                  <a:srgbClr val="263746"/>
+                </a:solidFill>
+                <a:latin typeface="Arial"/>
+                <a:ea typeface="Arial"/>
+                <a:cs typeface="Arial"/>
+              </a:rPr>
+              <a:t> </a:t>
+            </a:r>
+            <a:r>
+              <a:rPr sz="1350" b="1" i="0" dirty="0" err="1">
+                <a:solidFill>
+                  <a:srgbClr val="263746"/>
+                </a:solidFill>
+                <a:latin typeface="Arial"/>
+                <a:ea typeface="Arial"/>
+                <a:cs typeface="Arial"/>
+              </a:rPr>
+              <a:t>јасни</a:t>
+            </a:r>
+            <a:r>
+              <a:rPr sz="1350" b="1" i="0" dirty="0">
+                <a:solidFill>
+                  <a:srgbClr val="263746"/>
+                </a:solidFill>
+                <a:latin typeface="Arial"/>
+                <a:ea typeface="Arial"/>
+                <a:cs typeface="Arial"/>
+              </a:rPr>
+              <a:t> </a:t>
+            </a:r>
+            <a:r>
+              <a:rPr sz="1350" b="1" i="0" dirty="0" err="1">
+                <a:solidFill>
+                  <a:srgbClr val="263746"/>
+                </a:solidFill>
+                <a:latin typeface="Arial"/>
+                <a:ea typeface="Arial"/>
+                <a:cs typeface="Arial"/>
+              </a:rPr>
+              <a:t>релациски</a:t>
+            </a:r>
+            <a:r>
+              <a:rPr sz="1350" b="1" i="0" dirty="0">
+                <a:solidFill>
+                  <a:srgbClr val="263746"/>
+                </a:solidFill>
+                <a:latin typeface="Arial"/>
+                <a:ea typeface="Arial"/>
+                <a:cs typeface="Arial"/>
+              </a:rPr>
+              <a:t> </a:t>
+            </a:r>
+            <a:r>
+              <a:rPr sz="1350" b="1" i="0" dirty="0" err="1">
+                <a:solidFill>
+                  <a:srgbClr val="263746"/>
+                </a:solidFill>
+                <a:latin typeface="Arial"/>
+                <a:ea typeface="Arial"/>
+                <a:cs typeface="Arial"/>
+              </a:rPr>
+              <a:t>тројки</a:t>
+            </a:r>
+            <a:r>
+              <a:rPr sz="1350" b="1" i="0" dirty="0">
+                <a:solidFill>
+                  <a:srgbClr val="263746"/>
+                </a:solidFill>
+                <a:latin typeface="Arial"/>
+                <a:ea typeface="Arial"/>
+                <a:cs typeface="Arial"/>
+              </a:rPr>
+              <a:t> </a:t>
+            </a:r>
+            <a:r>
+              <a:rPr sz="1350" b="1" i="0" dirty="0" err="1">
+                <a:solidFill>
+                  <a:srgbClr val="263746"/>
+                </a:solidFill>
+                <a:latin typeface="Arial"/>
+                <a:ea typeface="Arial"/>
+                <a:cs typeface="Arial"/>
+              </a:rPr>
+              <a:t>што</a:t>
+            </a:r>
+            <a:r>
+              <a:rPr sz="1350" b="1" i="0" dirty="0">
+                <a:solidFill>
+                  <a:srgbClr val="263746"/>
+                </a:solidFill>
+                <a:latin typeface="Arial"/>
+                <a:ea typeface="Arial"/>
+                <a:cs typeface="Arial"/>
+              </a:rPr>
+              <a:t> </a:t>
+            </a:r>
+            <a:r>
+              <a:rPr sz="1350" b="1" i="0" dirty="0" err="1">
+                <a:solidFill>
+                  <a:srgbClr val="263746"/>
+                </a:solidFill>
+                <a:latin typeface="Arial"/>
+                <a:ea typeface="Arial"/>
+                <a:cs typeface="Arial"/>
+              </a:rPr>
+              <a:t>го</a:t>
+            </a:r>
+            <a:r>
+              <a:rPr sz="1350" b="1" i="0" dirty="0">
+                <a:solidFill>
+                  <a:srgbClr val="263746"/>
+                </a:solidFill>
+                <a:latin typeface="Arial"/>
+                <a:ea typeface="Arial"/>
+                <a:cs typeface="Arial"/>
+              </a:rPr>
+              <a:t> </a:t>
+            </a:r>
+            <a:r>
+              <a:rPr sz="1350" b="1" i="0" dirty="0" err="1">
+                <a:solidFill>
+                  <a:srgbClr val="263746"/>
+                </a:solidFill>
+                <a:latin typeface="Arial"/>
+                <a:ea typeface="Arial"/>
+                <a:cs typeface="Arial"/>
+              </a:rPr>
+              <a:t>поврзуваат</a:t>
+            </a:r>
+            <a:r>
+              <a:rPr sz="1350" b="1" i="0" dirty="0">
+                <a:solidFill>
+                  <a:srgbClr val="263746"/>
+                </a:solidFill>
+                <a:latin typeface="Arial"/>
+                <a:ea typeface="Arial"/>
+                <a:cs typeface="Arial"/>
+              </a:rPr>
+              <a:t> </a:t>
+            </a:r>
+            <a:r>
+              <a:rPr sz="1350" b="1" i="0" dirty="0" err="1">
+                <a:solidFill>
+                  <a:srgbClr val="263746"/>
+                </a:solidFill>
+                <a:latin typeface="Arial"/>
+                <a:ea typeface="Arial"/>
+                <a:cs typeface="Arial"/>
+              </a:rPr>
+              <a:t>со</a:t>
+            </a:r>
+            <a:r>
+              <a:rPr sz="1350" b="1" i="0" dirty="0">
+                <a:solidFill>
+                  <a:srgbClr val="263746"/>
+                </a:solidFill>
+                <a:latin typeface="Arial"/>
+                <a:ea typeface="Arial"/>
+                <a:cs typeface="Arial"/>
+              </a:rPr>
+              <a:t> </a:t>
+            </a:r>
+            <a:r>
+              <a:rPr sz="1350" b="1" i="0" dirty="0" err="1">
+                <a:solidFill>
+                  <a:srgbClr val="263746"/>
+                </a:solidFill>
+                <a:latin typeface="Arial"/>
+                <a:ea typeface="Arial"/>
+                <a:cs typeface="Arial"/>
+              </a:rPr>
+              <a:t>прашањето</a:t>
+            </a:r>
+            <a:r>
+              <a:rPr sz="1350" b="1" i="0" dirty="0">
+                <a:solidFill>
+                  <a:srgbClr val="263746"/>
+                </a:solidFill>
+                <a:latin typeface="Arial"/>
+                <a:ea typeface="Arial"/>
+                <a:cs typeface="Arial"/>
+              </a:rPr>
+              <a:t>.</a:t>
             </a:r>
           </a:p>
         </p:txBody>
@@ -14408,17 +17037,14 @@
                 <a:cs typeface="Arial"/>
               </a:defRPr>
             </a:pPr>
-            <a:r>
-              <a:rPr sz="1500" b="0" i="0">
-                <a:solidFill>
-                  <a:srgbClr val="263746"/>
-                </a:solidFill>
-                <a:latin typeface="Arial"/>
-                <a:ea typeface="Arial"/>
-                <a:cs typeface="Arial"/>
-              </a:rPr>
-              <a:t>Виктор Костадиноски · 226009</a:t>
-            </a:r>
+            <a:endParaRPr lang="mk-MK" sz="1500" b="0" i="0" dirty="0">
+              <a:solidFill>
+                <a:srgbClr val="263746"/>
+              </a:solidFill>
+              <a:latin typeface="Arial"/>
+              <a:ea typeface="Arial"/>
+              <a:cs typeface="Arial"/>
+            </a:endParaRPr>
           </a:p>
         </p:txBody>
       </p:sp>
@@ -14438,7 +17064,7 @@
         </p:nvSpPr>
         <p:spPr>
           <a:xfrm>
-            <a:off x="1143000" y="4552950"/>
+            <a:off x="1143000" y="4095750"/>
             <a:ext cx="9906000" cy="333375"/>
           </a:xfrm>
           <a:prstGeom prst="rect">
@@ -14467,7 +17093,7 @@
               </a:defRPr>
             </a:pPr>
             <a:r>
-              <a:rPr sz="1275" b="0" i="0">
+              <a:rPr sz="1275" b="0" i="0" dirty="0" err="1">
                 <a:solidFill>
                   <a:srgbClr val="4F86C6"/>
                 </a:solidFill>
@@ -14475,8 +17101,60 @@
                 <a:ea typeface="Arial"/>
                 <a:cs typeface="Arial"/>
               </a:rPr>
-              <a:t>github.com/Itonkdong/graphragx</a:t>
-            </a:r>
+              <a:t>github.com</a:t>
+            </a:r>
+            <a:r>
+              <a:rPr sz="1275" b="0" i="0" dirty="0">
+                <a:solidFill>
+                  <a:srgbClr val="4F86C6"/>
+                </a:solidFill>
+                <a:latin typeface="Arial"/>
+                <a:ea typeface="Arial"/>
+                <a:cs typeface="Arial"/>
+              </a:rPr>
+              <a:t>/</a:t>
+            </a:r>
+            <a:r>
+              <a:rPr sz="1275" b="0" i="0" dirty="0" err="1">
+                <a:solidFill>
+                  <a:srgbClr val="4F86C6"/>
+                </a:solidFill>
+                <a:latin typeface="Arial"/>
+                <a:ea typeface="Arial"/>
+                <a:cs typeface="Arial"/>
+              </a:rPr>
+              <a:t>Itonkdong</a:t>
+            </a:r>
+            <a:r>
+              <a:rPr sz="1275" b="0" i="0" dirty="0">
+                <a:solidFill>
+                  <a:srgbClr val="4F86C6"/>
+                </a:solidFill>
+                <a:latin typeface="Arial"/>
+                <a:ea typeface="Arial"/>
+                <a:cs typeface="Arial"/>
+              </a:rPr>
+              <a:t>/</a:t>
+            </a:r>
+            <a:r>
+              <a:rPr sz="1275" b="0" i="0" dirty="0" err="1">
+                <a:solidFill>
+                  <a:srgbClr val="4F86C6"/>
+                </a:solidFill>
+                <a:latin typeface="Arial"/>
+                <a:ea typeface="Arial"/>
+                <a:cs typeface="Arial"/>
+              </a:rPr>
+              <a:t>graphragx</a:t>
+            </a:r>
+            <a:endParaRPr sz="1275" b="0" i="0" dirty="0">
+              <a:solidFill>
+                <a:srgbClr val="4F86C6"/>
+              </a:solidFill>
+              <a:latin typeface="Arial"/>
+              <a:ea typeface="Arial"/>
+              <a:cs typeface="Arial"/>
+            </a:endParaRPr>
           </a:p>
         </p:txBody>
       </p:sp>
@@ -14563,15 +17241,15 @@
               </a:defRPr>
             </a:pPr>
             <a:r>
-              <a:rPr sz="2325" b="1" i="0">
-                <a:solidFill>
-                  <a:srgbClr val="263746"/>
-                </a:solidFill>
-                <a:latin typeface="Arial"/>
-                <a:ea typeface="Arial"/>
-                <a:cs typeface="Arial"/>
-              </a:rPr>
-              <a:t>Сродни пристапи и истражувачка празнина</a:t>
+              <a:rPr lang="mk-MK" sz="2325" b="1" i="0" noProof="0" dirty="0">
+                <a:solidFill>
+                  <a:srgbClr val="263746"/>
+                </a:solidFill>
+                <a:latin typeface="Arial"/>
+                <a:ea typeface="Arial"/>
+                <a:cs typeface="Arial"/>
+              </a:rPr>
+              <a:t>Сродни пристапи</a:t>
             </a:r>
           </a:p>
         </p:txBody>
@@ -14610,7 +17288,7 @@
           <a:bodyPr/>
           <a:lstStyle/>
           <a:p>
-            <a:endParaRPr lang="en-US"/>
+            <a:endParaRPr lang="mk-MK" noProof="0" dirty="0"/>
           </a:p>
         </p:txBody>
       </p:sp>
@@ -14659,7 +17337,7 @@
               </a:defRPr>
             </a:pPr>
             <a:r>
-              <a:rPr sz="825" b="0" i="0">
+              <a:rPr lang="mk-MK" sz="825" b="0" i="0" noProof="0" dirty="0" err="1">
                 <a:solidFill>
                   <a:srgbClr val="617080"/>
                 </a:solidFill>
@@ -14667,7 +17345,128 @@
                 <a:ea typeface="Arial"/>
                 <a:cs typeface="Arial"/>
               </a:rPr>
-              <a:t>Mavromatis and Karypis, 2025 · He et al., 2024</a:t>
+              <a:t>Mavromatis</a:t>
+            </a:r>
+            <a:r>
+              <a:rPr lang="mk-MK" sz="825" b="0" i="0" noProof="0" dirty="0">
+                <a:solidFill>
+                  <a:srgbClr val="617080"/>
+                </a:solidFill>
+                <a:latin typeface="Arial"/>
+                <a:ea typeface="Arial"/>
+                <a:cs typeface="Arial"/>
+              </a:rPr>
+              <a:t> </a:t>
+            </a:r>
+            <a:r>
+              <a:rPr lang="mk-MK" sz="825" b="0" i="0" noProof="0" dirty="0" err="1">
+                <a:solidFill>
+                  <a:srgbClr val="617080"/>
+                </a:solidFill>
+                <a:latin typeface="Arial"/>
+                <a:ea typeface="Arial"/>
+                <a:cs typeface="Arial"/>
+              </a:rPr>
+              <a:t>and</a:t>
+            </a:r>
+            <a:r>
+              <a:rPr lang="mk-MK" sz="825" b="0" i="0" noProof="0" dirty="0">
+                <a:solidFill>
+                  <a:srgbClr val="617080"/>
+                </a:solidFill>
+                <a:latin typeface="Arial"/>
+                <a:ea typeface="Arial"/>
+                <a:cs typeface="Arial"/>
+              </a:rPr>
+              <a:t> </a:t>
+            </a:r>
+            <a:r>
+              <a:rPr lang="mk-MK" sz="825" b="0" i="0" noProof="0" dirty="0" err="1">
+                <a:solidFill>
+                  <a:srgbClr val="617080"/>
+                </a:solidFill>
+                <a:latin typeface="Arial"/>
+                <a:ea typeface="Arial"/>
+                <a:cs typeface="Arial"/>
+              </a:rPr>
+              <a:t>Karypis</a:t>
+            </a:r>
+            <a:r>
+              <a:rPr lang="mk-MK" sz="825" b="0" i="0" noProof="0" dirty="0">
+                <a:solidFill>
+                  <a:srgbClr val="617080"/>
+                </a:solidFill>
+                <a:latin typeface="Arial"/>
+                <a:ea typeface="Arial"/>
+                <a:cs typeface="Arial"/>
+              </a:rPr>
+              <a:t>, 2025 · </a:t>
+            </a:r>
+            <a:r>
+              <a:rPr lang="mk-MK" sz="825" b="0" i="0" noProof="0" dirty="0" err="1">
+                <a:solidFill>
+                  <a:srgbClr val="617080"/>
+                </a:solidFill>
+                <a:latin typeface="Arial"/>
+                <a:ea typeface="Arial"/>
+                <a:cs typeface="Arial"/>
+              </a:rPr>
+              <a:t>He</a:t>
+            </a:r>
+            <a:r>
+              <a:rPr lang="mk-MK" sz="825" b="0" i="0" noProof="0" dirty="0">
+                <a:solidFill>
+                  <a:srgbClr val="617080"/>
+                </a:solidFill>
+                <a:latin typeface="Arial"/>
+                <a:ea typeface="Arial"/>
+                <a:cs typeface="Arial"/>
+              </a:rPr>
+              <a:t> </a:t>
+            </a:r>
+            <a:r>
+              <a:rPr lang="mk-MK" sz="825" b="0" i="0" noProof="0" dirty="0" err="1">
+                <a:solidFill>
+                  <a:srgbClr val="617080"/>
+                </a:solidFill>
+                <a:latin typeface="Arial"/>
+                <a:ea typeface="Arial"/>
+                <a:cs typeface="Arial"/>
+              </a:rPr>
+              <a:t>et</a:t>
+            </a:r>
+            <a:r>
+              <a:rPr lang="mk-MK" sz="825" b="0" i="0" noProof="0" dirty="0">
+                <a:solidFill>
+                  <a:srgbClr val="617080"/>
+                </a:solidFill>
+                <a:latin typeface="Arial"/>
+                <a:ea typeface="Arial"/>
+                <a:cs typeface="Arial"/>
+              </a:rPr>
+              <a:t> </a:t>
+            </a:r>
+            <a:r>
+              <a:rPr lang="mk-MK" sz="825" b="0" i="0" noProof="0" dirty="0" err="1">
+                <a:solidFill>
+                  <a:srgbClr val="617080"/>
+                </a:solidFill>
+                <a:latin typeface="Arial"/>
+                <a:ea typeface="Arial"/>
+                <a:cs typeface="Arial"/>
+              </a:rPr>
+              <a:t>al</a:t>
+            </a:r>
+            <a:r>
+              <a:rPr lang="mk-MK" sz="825" b="0" i="0" noProof="0" dirty="0">
+                <a:solidFill>
+                  <a:srgbClr val="617080"/>
+                </a:solidFill>
+                <a:latin typeface="Arial"/>
+                <a:ea typeface="Arial"/>
+                <a:cs typeface="Arial"/>
+              </a:rPr>
+              <a:t>., 2024</a:t>
             </a:r>
           </a:p>
         </p:txBody>
@@ -14717,7 +17516,7 @@
               </a:defRPr>
             </a:pPr>
             <a:r>
-              <a:rPr sz="900" b="0" i="0">
+              <a:rPr lang="mk-MK" sz="900" b="0" i="0" noProof="0" dirty="0">
                 <a:solidFill>
                   <a:srgbClr val="617080"/>
                 </a:solidFill>
@@ -14775,7 +17574,7 @@
               </a:defRPr>
             </a:pPr>
             <a:r>
-              <a:rPr sz="1125" b="1" i="0">
+              <a:rPr lang="mk-MK" sz="1125" b="1" i="0" noProof="0" dirty="0">
                 <a:solidFill>
                   <a:srgbClr val="4F86C6"/>
                 </a:solidFill>
@@ -14833,7 +17632,7 @@
               </a:defRPr>
             </a:pPr>
             <a:r>
-              <a:rPr sz="1575" b="1" i="0">
+              <a:rPr lang="mk-MK" sz="1575" b="1" i="0" noProof="0" dirty="0">
                 <a:solidFill>
                   <a:srgbClr val="4F86C6"/>
                 </a:solidFill>
@@ -14880,7 +17679,7 @@
           <a:bodyPr/>
           <a:lstStyle/>
           <a:p>
-            <a:endParaRPr lang="en-US"/>
+            <a:endParaRPr lang="mk-MK" noProof="0" dirty="0"/>
           </a:p>
         </p:txBody>
       </p:sp>
@@ -14929,7 +17728,7 @@
               </a:defRPr>
             </a:pPr>
             <a:r>
-              <a:rPr sz="1425" b="0" i="0">
+              <a:rPr lang="mk-MK" sz="1425" b="0" i="0" noProof="0" dirty="0">
                 <a:solidFill>
                   <a:srgbClr val="263746"/>
                 </a:solidFill>
@@ -14976,7 +17775,7 @@
           <a:bodyPr/>
           <a:lstStyle/>
           <a:p>
-            <a:endParaRPr lang="en-US"/>
+            <a:endParaRPr lang="mk-MK" noProof="0" dirty="0"/>
           </a:p>
         </p:txBody>
       </p:sp>
@@ -15025,7 +17824,7 @@
               </a:defRPr>
             </a:pPr>
             <a:r>
-              <a:rPr sz="1425" b="0" i="0">
+              <a:rPr lang="mk-MK" sz="1425" b="0" i="0" noProof="0" dirty="0">
                 <a:solidFill>
                   <a:srgbClr val="263746"/>
                 </a:solidFill>
@@ -15072,7 +17871,7 @@
           <a:bodyPr/>
           <a:lstStyle/>
           <a:p>
-            <a:endParaRPr lang="en-US"/>
+            <a:endParaRPr lang="mk-MK" noProof="0" dirty="0"/>
           </a:p>
         </p:txBody>
       </p:sp>
@@ -15121,7 +17920,7 @@
               </a:defRPr>
             </a:pPr>
             <a:r>
-              <a:rPr sz="1125" b="1" i="0">
+              <a:rPr lang="mk-MK" sz="1125" b="1" i="0" noProof="0" dirty="0" err="1">
                 <a:solidFill>
                   <a:srgbClr val="398D84"/>
                 </a:solidFill>
@@ -15131,6 +17930,14 @@
               </a:rPr>
               <a:t>G-Retriever</a:t>
             </a:r>
+            <a:endParaRPr lang="mk-MK" sz="1125" b="1" i="0" noProof="0" dirty="0">
+              <a:solidFill>
+                <a:srgbClr val="398D84"/>
+              </a:solidFill>
+              <a:latin typeface="Arial"/>
+              <a:ea typeface="Arial"/>
+              <a:cs typeface="Arial"/>
+            </a:endParaRPr>
           </a:p>
         </p:txBody>
       </p:sp>
@@ -15179,7 +17986,7 @@
               </a:defRPr>
             </a:pPr>
             <a:r>
-              <a:rPr sz="1575" b="1" i="0">
+              <a:rPr lang="mk-MK" sz="1575" b="1" i="0" noProof="0" dirty="0">
                 <a:solidFill>
                   <a:srgbClr val="398D84"/>
                 </a:solidFill>
@@ -15187,7 +17994,7 @@
                 <a:ea typeface="Arial"/>
                 <a:cs typeface="Arial"/>
               </a:rPr>
-              <a:t>кодер на графови  →  PCST  →  LLM</a:t>
+              <a:t>Кодер на графови  →  PCST  →  LLM</a:t>
             </a:r>
           </a:p>
         </p:txBody>
@@ -15226,7 +18033,7 @@
           <a:bodyPr/>
           <a:lstStyle/>
           <a:p>
-            <a:endParaRPr lang="en-US"/>
+            <a:endParaRPr lang="mk-MK" noProof="0" dirty="0"/>
           </a:p>
         </p:txBody>
       </p:sp>
@@ -15275,7 +18082,7 @@
               </a:defRPr>
             </a:pPr>
             <a:r>
-              <a:rPr sz="1425" b="0" i="0">
+              <a:rPr lang="mk-MK" sz="1425" b="0" i="0" noProof="0" dirty="0">
                 <a:solidFill>
                   <a:srgbClr val="263746"/>
                 </a:solidFill>
@@ -15322,7 +18129,7 @@
           <a:bodyPr/>
           <a:lstStyle/>
           <a:p>
-            <a:endParaRPr lang="en-US"/>
+            <a:endParaRPr lang="mk-MK" noProof="0" dirty="0"/>
           </a:p>
         </p:txBody>
       </p:sp>
@@ -15371,7 +18178,7 @@
               </a:defRPr>
             </a:pPr>
             <a:r>
-              <a:rPr sz="1425" b="0" i="0">
+              <a:rPr lang="mk-MK" sz="1425" b="0" i="0" noProof="0" dirty="0">
                 <a:solidFill>
                   <a:srgbClr val="263746"/>
                 </a:solidFill>
@@ -15422,7 +18229,7 @@
           <a:bodyPr/>
           <a:lstStyle/>
           <a:p>
-            <a:endParaRPr lang="en-US"/>
+            <a:endParaRPr lang="mk-MK" noProof="0" dirty="0"/>
           </a:p>
         </p:txBody>
       </p:sp>
@@ -15471,7 +18278,7 @@
               </a:defRPr>
             </a:pPr>
             <a:r>
-              <a:rPr sz="1800" b="1" i="0">
+              <a:rPr lang="mk-MK" sz="1800" b="1" i="0" noProof="0" dirty="0">
                 <a:solidFill>
                   <a:srgbClr val="4F86C6"/>
                 </a:solidFill>
@@ -15529,7 +18336,7 @@
               </a:defRPr>
             </a:pPr>
             <a:r>
-              <a:rPr sz="1800" b="1" i="0">
+              <a:rPr lang="mk-MK" sz="1800" b="1" i="0" noProof="0" dirty="0">
                 <a:solidFill>
                   <a:srgbClr val="263746"/>
                 </a:solidFill>
@@ -15843,15 +18650,356 @@
               </a:defRPr>
             </a:pPr>
             <a:r>
-              <a:rPr sz="1500" b="1" i="0">
-                <a:solidFill>
-                  <a:srgbClr val="263746"/>
-                </a:solidFill>
-                <a:latin typeface="Arial"/>
-                <a:ea typeface="Arial"/>
-                <a:cs typeface="Arial"/>
-              </a:rPr>
-              <a:t>Резултатите од секоја фаза се следат одделно за да се утврди каде се губи потребната информација.</a:t>
+              <a:rPr sz="1500" b="1" i="0" dirty="0" err="1">
+                <a:solidFill>
+                  <a:srgbClr val="263746"/>
+                </a:solidFill>
+                <a:latin typeface="Arial"/>
+                <a:ea typeface="Arial"/>
+                <a:cs typeface="Arial"/>
+              </a:rPr>
+              <a:t>Резултатите</a:t>
+            </a:r>
+            <a:r>
+              <a:rPr sz="1500" b="1" i="0" dirty="0">
+                <a:solidFill>
+                  <a:srgbClr val="263746"/>
+                </a:solidFill>
+                <a:latin typeface="Arial"/>
+                <a:ea typeface="Arial"/>
+                <a:cs typeface="Arial"/>
+              </a:rPr>
+              <a:t> </a:t>
+            </a:r>
+            <a:r>
+              <a:rPr sz="1500" b="1" i="0" dirty="0" err="1">
+                <a:solidFill>
+                  <a:srgbClr val="263746"/>
+                </a:solidFill>
+                <a:latin typeface="Arial"/>
+                <a:ea typeface="Arial"/>
+                <a:cs typeface="Arial"/>
+              </a:rPr>
+              <a:t>од</a:t>
+            </a:r>
+            <a:r>
+              <a:rPr sz="1500" b="1" i="0" dirty="0">
+                <a:solidFill>
+                  <a:srgbClr val="263746"/>
+                </a:solidFill>
+                <a:latin typeface="Arial"/>
+                <a:ea typeface="Arial"/>
+                <a:cs typeface="Arial"/>
+              </a:rPr>
+              <a:t> </a:t>
+            </a:r>
+            <a:r>
+              <a:rPr sz="1500" b="1" i="0" dirty="0" err="1">
+                <a:solidFill>
+                  <a:srgbClr val="263746"/>
+                </a:solidFill>
+                <a:latin typeface="Arial"/>
+                <a:ea typeface="Arial"/>
+                <a:cs typeface="Arial"/>
+              </a:rPr>
+              <a:t>секоја</a:t>
+            </a:r>
+            <a:r>
+              <a:rPr sz="1500" b="1" i="0" dirty="0">
+                <a:solidFill>
+                  <a:srgbClr val="263746"/>
+                </a:solidFill>
+                <a:latin typeface="Arial"/>
+                <a:ea typeface="Arial"/>
+                <a:cs typeface="Arial"/>
+              </a:rPr>
+              <a:t> </a:t>
+            </a:r>
+            <a:r>
+              <a:rPr sz="1500" b="1" i="0" dirty="0" err="1">
+                <a:solidFill>
+                  <a:srgbClr val="263746"/>
+                </a:solidFill>
+                <a:latin typeface="Arial"/>
+                <a:ea typeface="Arial"/>
+                <a:cs typeface="Arial"/>
+              </a:rPr>
+              <a:t>фаза</a:t>
+            </a:r>
+            <a:r>
+              <a:rPr sz="1500" b="1" i="0" dirty="0">
+                <a:solidFill>
+                  <a:srgbClr val="263746"/>
+                </a:solidFill>
+                <a:latin typeface="Arial"/>
+                <a:ea typeface="Arial"/>
+                <a:cs typeface="Arial"/>
+              </a:rPr>
+              <a:t> </a:t>
+            </a:r>
+            <a:r>
+              <a:rPr sz="1500" b="1" i="0" dirty="0" err="1">
+                <a:solidFill>
+                  <a:srgbClr val="263746"/>
+                </a:solidFill>
+                <a:latin typeface="Arial"/>
+                <a:ea typeface="Arial"/>
+                <a:cs typeface="Arial"/>
+              </a:rPr>
+              <a:t>се</a:t>
+            </a:r>
+            <a:r>
+              <a:rPr sz="1500" b="1" i="0" dirty="0">
+                <a:solidFill>
+                  <a:srgbClr val="263746"/>
+                </a:solidFill>
+                <a:latin typeface="Arial"/>
+                <a:ea typeface="Arial"/>
+                <a:cs typeface="Arial"/>
+              </a:rPr>
+              <a:t> </a:t>
+            </a:r>
+            <a:r>
+              <a:rPr sz="1500" b="1" i="0" dirty="0" err="1">
+                <a:solidFill>
+                  <a:srgbClr val="263746"/>
+                </a:solidFill>
+                <a:latin typeface="Arial"/>
+                <a:ea typeface="Arial"/>
+                <a:cs typeface="Arial"/>
+              </a:rPr>
+              <a:t>следат</a:t>
+            </a:r>
+            <a:r>
+              <a:rPr sz="1500" b="1" i="0" dirty="0">
+                <a:solidFill>
+                  <a:srgbClr val="263746"/>
+                </a:solidFill>
+                <a:latin typeface="Arial"/>
+                <a:ea typeface="Arial"/>
+                <a:cs typeface="Arial"/>
+              </a:rPr>
+              <a:t> </a:t>
+            </a:r>
+            <a:r>
+              <a:rPr sz="1500" b="1" i="0" dirty="0" err="1">
+                <a:solidFill>
+                  <a:srgbClr val="263746"/>
+                </a:solidFill>
+                <a:latin typeface="Arial"/>
+                <a:ea typeface="Arial"/>
+                <a:cs typeface="Arial"/>
+              </a:rPr>
+              <a:t>одделно</a:t>
+            </a:r>
+            <a:r>
+              <a:rPr sz="1500" b="1" i="0" dirty="0">
+                <a:solidFill>
+                  <a:srgbClr val="263746"/>
+                </a:solidFill>
+                <a:latin typeface="Arial"/>
+                <a:ea typeface="Arial"/>
+                <a:cs typeface="Arial"/>
+              </a:rPr>
+              <a:t> </a:t>
+            </a:r>
+            <a:r>
+              <a:rPr sz="1500" b="1" i="0" dirty="0" err="1">
+                <a:solidFill>
+                  <a:srgbClr val="263746"/>
+                </a:solidFill>
+                <a:latin typeface="Arial"/>
+                <a:ea typeface="Arial"/>
+                <a:cs typeface="Arial"/>
+              </a:rPr>
+              <a:t>за</a:t>
+            </a:r>
+            <a:r>
+              <a:rPr sz="1500" b="1" i="0" dirty="0">
+                <a:solidFill>
+                  <a:srgbClr val="263746"/>
+                </a:solidFill>
+                <a:latin typeface="Arial"/>
+                <a:ea typeface="Arial"/>
+                <a:cs typeface="Arial"/>
+              </a:rPr>
+              <a:t> </a:t>
+            </a:r>
+            <a:r>
+              <a:rPr sz="1500" b="1" i="0" dirty="0" err="1">
+                <a:solidFill>
+                  <a:srgbClr val="263746"/>
+                </a:solidFill>
+                <a:latin typeface="Arial"/>
+                <a:ea typeface="Arial"/>
+                <a:cs typeface="Arial"/>
+              </a:rPr>
+              <a:t>да</a:t>
+            </a:r>
+            <a:r>
+              <a:rPr sz="1500" b="1" i="0" dirty="0">
+                <a:solidFill>
+                  <a:srgbClr val="263746"/>
+                </a:solidFill>
+                <a:latin typeface="Arial"/>
+                <a:ea typeface="Arial"/>
+                <a:cs typeface="Arial"/>
+              </a:rPr>
+              <a:t> </a:t>
+            </a:r>
+            <a:r>
+              <a:rPr sz="1500" b="1" i="0" dirty="0" err="1">
+                <a:solidFill>
+                  <a:srgbClr val="263746"/>
+                </a:solidFill>
+                <a:latin typeface="Arial"/>
+                <a:ea typeface="Arial"/>
+                <a:cs typeface="Arial"/>
+              </a:rPr>
+              <a:t>се</a:t>
+            </a:r>
+            <a:r>
+              <a:rPr sz="1500" b="1" i="0" dirty="0">
+                <a:solidFill>
+                  <a:srgbClr val="263746"/>
+                </a:solidFill>
+                <a:latin typeface="Arial"/>
+                <a:ea typeface="Arial"/>
+                <a:cs typeface="Arial"/>
+              </a:rPr>
+              <a:t> </a:t>
+            </a:r>
+            <a:r>
+              <a:rPr sz="1500" b="1" i="0" dirty="0" err="1">
+                <a:solidFill>
+                  <a:srgbClr val="263746"/>
+                </a:solidFill>
+                <a:latin typeface="Arial"/>
+                <a:ea typeface="Arial"/>
+                <a:cs typeface="Arial"/>
+              </a:rPr>
+              <a:t>утврди</a:t>
+            </a:r>
+            <a:r>
+              <a:rPr sz="1500" b="1" i="0" dirty="0">
+                <a:solidFill>
+                  <a:srgbClr val="263746"/>
+                </a:solidFill>
+                <a:latin typeface="Arial"/>
+                <a:ea typeface="Arial"/>
+                <a:cs typeface="Arial"/>
+              </a:rPr>
+              <a:t> </a:t>
+            </a:r>
+            <a:r>
+              <a:rPr sz="1500" b="1" i="0" dirty="0" err="1">
+                <a:solidFill>
+                  <a:srgbClr val="263746"/>
+                </a:solidFill>
+                <a:latin typeface="Arial"/>
+                <a:ea typeface="Arial"/>
+                <a:cs typeface="Arial"/>
+              </a:rPr>
+              <a:t>каде</a:t>
+            </a:r>
+            <a:r>
+              <a:rPr sz="1500" b="1" i="0" dirty="0">
+                <a:solidFill>
+                  <a:srgbClr val="263746"/>
+                </a:solidFill>
+                <a:latin typeface="Arial"/>
+                <a:ea typeface="Arial"/>
+                <a:cs typeface="Arial"/>
+              </a:rPr>
+              <a:t> </a:t>
+            </a:r>
+            <a:r>
+              <a:rPr sz="1500" b="1" i="0" dirty="0" err="1">
+                <a:solidFill>
+                  <a:srgbClr val="263746"/>
+                </a:solidFill>
+                <a:latin typeface="Arial"/>
+                <a:ea typeface="Arial"/>
+                <a:cs typeface="Arial"/>
+              </a:rPr>
+              <a:t>се</a:t>
+            </a:r>
+            <a:r>
+              <a:rPr sz="1500" b="1" i="0" dirty="0">
+                <a:solidFill>
+                  <a:srgbClr val="263746"/>
+                </a:solidFill>
+                <a:latin typeface="Arial"/>
+                <a:ea typeface="Arial"/>
+                <a:cs typeface="Arial"/>
+              </a:rPr>
+              <a:t> </a:t>
+            </a:r>
+            <a:r>
+              <a:rPr sz="1500" b="1" i="0" dirty="0" err="1">
+                <a:solidFill>
+                  <a:srgbClr val="263746"/>
+                </a:solidFill>
+                <a:latin typeface="Arial"/>
+                <a:ea typeface="Arial"/>
+                <a:cs typeface="Arial"/>
+              </a:rPr>
+              <a:t>губи</a:t>
+            </a:r>
+            <a:r>
+              <a:rPr sz="1500" b="1" i="0" dirty="0">
+                <a:solidFill>
+                  <a:srgbClr val="263746"/>
+                </a:solidFill>
+                <a:latin typeface="Arial"/>
+                <a:ea typeface="Arial"/>
+                <a:cs typeface="Arial"/>
+              </a:rPr>
+              <a:t> </a:t>
+            </a:r>
+            <a:r>
+              <a:rPr sz="1500" b="1" i="0" dirty="0" err="1">
+                <a:solidFill>
+                  <a:srgbClr val="263746"/>
+                </a:solidFill>
+                <a:latin typeface="Arial"/>
+                <a:ea typeface="Arial"/>
+                <a:cs typeface="Arial"/>
+              </a:rPr>
+              <a:t>потребната</a:t>
+            </a:r>
+            <a:r>
+              <a:rPr sz="1500" b="1" i="0" dirty="0">
+                <a:solidFill>
+                  <a:srgbClr val="263746"/>
+                </a:solidFill>
+                <a:latin typeface="Arial"/>
+                <a:ea typeface="Arial"/>
+                <a:cs typeface="Arial"/>
+              </a:rPr>
+              <a:t> </a:t>
+            </a:r>
+            <a:r>
+              <a:rPr sz="1500" b="1" i="0" dirty="0" err="1">
+                <a:solidFill>
+                  <a:srgbClr val="263746"/>
+                </a:solidFill>
+                <a:latin typeface="Arial"/>
+                <a:ea typeface="Arial"/>
+                <a:cs typeface="Arial"/>
+              </a:rPr>
+              <a:t>информација</a:t>
+            </a:r>
+            <a:r>
+              <a:rPr sz="1500" b="1" i="0" dirty="0">
+                <a:solidFill>
+                  <a:srgbClr val="263746"/>
+                </a:solidFill>
+                <a:latin typeface="Arial"/>
+                <a:ea typeface="Arial"/>
+                <a:cs typeface="Arial"/>
+              </a:rPr>
+              <a:t>.</a:t>
             </a:r>
           </a:p>
         </p:txBody>
@@ -17104,7 +20252,7 @@
           <a:bodyPr/>
           <a:lstStyle/>
           <a:p>
-            <a:endParaRPr lang="en-US"/>
+            <a:endParaRPr lang="en-US" dirty="0"/>
           </a:p>
         </p:txBody>
       </p:sp>
@@ -17488,7 +20636,7 @@
           </a:bodyPr>
           <a:lstStyle/>
           <a:p>
-            <a:pPr algn="l">
+            <a:pPr>
               <a:defRPr sz="1500" b="1" i="0">
                 <a:solidFill>
                   <a:srgbClr val="263746"/>
@@ -17499,16 +20647,24 @@
               </a:defRPr>
             </a:pPr>
             <a:r>
-              <a:rPr sz="1500" b="1" i="0">
-                <a:solidFill>
-                  <a:srgbClr val="263746"/>
-                </a:solidFill>
-                <a:latin typeface="Arial"/>
-                <a:ea typeface="Arial"/>
-                <a:cs typeface="Arial"/>
-              </a:rPr>
-              <a:t>Заедничка евалуација</a:t>
-            </a:r>
+              <a:rPr lang="mk-MK" sz="1600" b="1" dirty="0">
+                <a:solidFill>
+                  <a:srgbClr val="263746"/>
+                </a:solidFill>
+                <a:latin typeface="Arial"/>
+                <a:ea typeface="Arial"/>
+                <a:cs typeface="Arial"/>
+              </a:rPr>
+              <a:t>Поделба на податоците</a:t>
+            </a:r>
+            <a:endParaRPr sz="1500" b="1" i="0" dirty="0">
+              <a:solidFill>
+                <a:srgbClr val="263746"/>
+              </a:solidFill>
+              <a:latin typeface="Arial"/>
+              <a:ea typeface="Arial"/>
+              <a:cs typeface="Arial"/>
+            </a:endParaRPr>
           </a:p>
         </p:txBody>
       </p:sp>
@@ -17557,7 +20713,7 @@
               </a:defRPr>
             </a:pPr>
             <a:r>
-              <a:rPr sz="1350" b="0" i="0">
+              <a:rPr lang="mk-MK" sz="1350" b="0" i="0" dirty="0">
                 <a:solidFill>
                   <a:srgbClr val="617080"/>
                 </a:solidFill>
@@ -17565,11 +20721,22 @@
                 <a:ea typeface="Arial"/>
                 <a:cs typeface="Arial"/>
               </a:rPr>
-              <a:t>seeds: 42 · 1337 · 2026</a:t>
-            </a:r>
-          </a:p>
-          <a:p>
-            <a:pPr algn="l">
+              <a:t>Трени</a:t>
+            </a:r>
+            <a:r>
+              <a:rPr lang="mk-MK" sz="1350" dirty="0">
+                <a:solidFill>
+                  <a:srgbClr val="617080"/>
+                </a:solidFill>
+                <a:latin typeface="Arial"/>
+                <a:ea typeface="Arial"/>
+                <a:cs typeface="Arial"/>
+              </a:rPr>
+              <a:t>рање: 2.848</a:t>
+            </a:r>
+          </a:p>
+          <a:p>
+            <a:pPr>
               <a:defRPr sz="1350" b="0" i="0">
                 <a:solidFill>
                   <a:srgbClr val="617080"/>
@@ -17580,7 +20747,7 @@
               </a:defRPr>
             </a:pPr>
             <a:r>
-              <a:rPr sz="1350" b="0" i="0">
+              <a:rPr lang="mk-MK" sz="1350" b="0" i="0" dirty="0">
                 <a:solidFill>
                   <a:srgbClr val="617080"/>
                 </a:solidFill>
@@ -17588,8 +20755,27 @@
                 <a:ea typeface="Arial"/>
                 <a:cs typeface="Arial"/>
               </a:rPr>
-              <a:t>праг: 0,7 · 10–15 кандидати</a:t>
-            </a:r>
+              <a:t>Валидација: </a:t>
+            </a:r>
+            <a:r>
+              <a:rPr lang="mk-MK" sz="1350" dirty="0">
+                <a:solidFill>
+                  <a:srgbClr val="617080"/>
+                </a:solidFill>
+                <a:latin typeface="Arial"/>
+                <a:ea typeface="Arial"/>
+                <a:cs typeface="Arial"/>
+              </a:rPr>
+              <a:t>250 · Тест: 1639</a:t>
+            </a:r>
+            <a:endParaRPr lang="mk-MK" sz="1350" b="0" i="0" dirty="0">
+              <a:solidFill>
+                <a:srgbClr val="617080"/>
+              </a:solidFill>
+              <a:latin typeface="Arial"/>
+              <a:ea typeface="Arial"/>
+              <a:cs typeface="Arial"/>
+            </a:endParaRPr>
           </a:p>
         </p:txBody>
       </p:sp>
@@ -17627,7 +20813,7 @@
           </a:bodyPr>
           <a:lstStyle/>
           <a:p>
-            <a:pPr algn="l">
+            <a:pPr>
               <a:defRPr sz="1725" b="1" i="0">
                 <a:solidFill>
                   <a:srgbClr val="263746"/>
@@ -17638,16 +20824,24 @@
               </a:defRPr>
             </a:pPr>
             <a:r>
-              <a:rPr sz="1725" b="1" i="0">
-                <a:solidFill>
-                  <a:srgbClr val="263746"/>
-                </a:solidFill>
-                <a:latin typeface="Arial"/>
-                <a:ea typeface="Arial"/>
-                <a:cs typeface="Arial"/>
-              </a:rPr>
-              <a:t>Поделба на податоците</a:t>
-            </a:r>
+              <a:rPr lang="mk-MK" b="1" dirty="0">
+                <a:solidFill>
+                  <a:srgbClr val="263746"/>
+                </a:solidFill>
+                <a:latin typeface="Arial"/>
+                <a:ea typeface="Arial"/>
+                <a:cs typeface="Arial"/>
+              </a:rPr>
+              <a:t>Заедничка конфигурација</a:t>
+            </a:r>
+            <a:endParaRPr sz="1725" b="1" i="0" dirty="0">
+              <a:solidFill>
+                <a:srgbClr val="263746"/>
+              </a:solidFill>
+              <a:latin typeface="Arial"/>
+              <a:ea typeface="Arial"/>
+              <a:cs typeface="Arial"/>
+            </a:endParaRPr>
           </a:p>
         </p:txBody>
       </p:sp>
@@ -17667,8 +20861,8 @@
         </p:nvSpPr>
         <p:spPr>
           <a:xfrm>
-            <a:off x="5334000" y="1809750"/>
-            <a:ext cx="1733550" cy="1285875"/>
+            <a:off x="5333999" y="1809750"/>
+            <a:ext cx="1807029" cy="1285875"/>
           </a:xfrm>
           <a:prstGeom prst="roundRect">
             <a:avLst>
@@ -17709,8 +20903,8 @@
         </p:nvSpPr>
         <p:spPr>
           <a:xfrm>
-            <a:off x="5448300" y="2028825"/>
-            <a:ext cx="1504950" cy="514350"/>
+            <a:off x="5370738" y="2025287"/>
+            <a:ext cx="1733550" cy="514350"/>
           </a:xfrm>
           <a:prstGeom prst="rect">
             <a:avLst/>
@@ -17723,7 +20917,7 @@
         </p:spPr>
         <p:txBody>
           <a:bodyPr wrap="square" lIns="38100" tIns="19050" rIns="38100" bIns="19050" anchor="ctr">
-            <a:normAutofit/>
+            <a:normAutofit fontScale="85000" lnSpcReduction="10000"/>
           </a:bodyPr>
           <a:lstStyle/>
           <a:p>
@@ -17738,7 +20932,7 @@
               </a:defRPr>
             </a:pPr>
             <a:r>
-              <a:rPr sz="2400" b="1" i="0">
+              <a:rPr lang="mk-MK" sz="2400" b="1" dirty="0">
                 <a:solidFill>
                   <a:srgbClr val="D97942"/>
                 </a:solidFill>
@@ -17746,8 +20940,16 @@
                 <a:ea typeface="Arial"/>
                 <a:cs typeface="Arial"/>
               </a:rPr>
-              <a:t>2.848</a:t>
-            </a:r>
+              <a:t>Извршувања</a:t>
+            </a:r>
+            <a:endParaRPr sz="2400" b="1" i="0" dirty="0">
+              <a:solidFill>
+                <a:srgbClr val="D97942"/>
+              </a:solidFill>
+              <a:latin typeface="Arial"/>
+              <a:ea typeface="Arial"/>
+              <a:cs typeface="Arial"/>
+            </a:endParaRPr>
           </a:p>
         </p:txBody>
       </p:sp>
@@ -17796,7 +20998,7 @@
               </a:defRPr>
             </a:pPr>
             <a:r>
-              <a:rPr sz="1200" b="0" i="0">
+              <a:rPr lang="mk-MK" sz="1200" b="0" i="0" dirty="0">
                 <a:solidFill>
                   <a:srgbClr val="617080"/>
                 </a:solidFill>
@@ -17804,8 +21006,16 @@
                 <a:ea typeface="Arial"/>
                 <a:cs typeface="Arial"/>
               </a:rPr>
-              <a:t>тренирање</a:t>
-            </a:r>
+              <a:t>3, независни</a:t>
+            </a:r>
+            <a:endParaRPr sz="1200" b="0" i="0" dirty="0">
+              <a:solidFill>
+                <a:srgbClr val="617080"/>
+              </a:solidFill>
+              <a:latin typeface="Arial"/>
+              <a:ea typeface="Arial"/>
+              <a:cs typeface="Arial"/>
+            </a:endParaRPr>
           </a:p>
         </p:txBody>
       </p:sp>
@@ -17896,7 +21106,7 @@
               </a:defRPr>
             </a:pPr>
             <a:r>
-              <a:rPr sz="2400" b="1" i="0">
+              <a:rPr lang="mk-MK" sz="2400" b="1" i="0" dirty="0">
                 <a:solidFill>
                   <a:srgbClr val="398D84"/>
                 </a:solidFill>
@@ -17904,8 +21114,16 @@
                 <a:ea typeface="Arial"/>
                 <a:cs typeface="Arial"/>
               </a:rPr>
-              <a:t>250</a:t>
-            </a:r>
+              <a:t>Праг</a:t>
+            </a:r>
+            <a:endParaRPr sz="2400" b="1" i="0" dirty="0">
+              <a:solidFill>
+                <a:srgbClr val="398D84"/>
+              </a:solidFill>
+              <a:latin typeface="Arial"/>
+              <a:ea typeface="Arial"/>
+              <a:cs typeface="Arial"/>
+            </a:endParaRPr>
           </a:p>
         </p:txBody>
       </p:sp>
@@ -17954,7 +21172,7 @@
               </a:defRPr>
             </a:pPr>
             <a:r>
-              <a:rPr sz="1200" b="0" i="0">
+              <a:rPr lang="mk-MK" sz="1200" b="0" i="0" dirty="0">
                 <a:solidFill>
                   <a:srgbClr val="617080"/>
                 </a:solidFill>
@@ -17962,8 +21180,16 @@
                 <a:ea typeface="Arial"/>
                 <a:cs typeface="Arial"/>
               </a:rPr>
-              <a:t>валидација</a:t>
-            </a:r>
+              <a:t>0.7</a:t>
+            </a:r>
+            <a:endParaRPr sz="1200" b="0" i="0" dirty="0">
+              <a:solidFill>
+                <a:srgbClr val="617080"/>
+              </a:solidFill>
+              <a:latin typeface="Arial"/>
+              <a:ea typeface="Arial"/>
+              <a:cs typeface="Arial"/>
+            </a:endParaRPr>
           </a:p>
         </p:txBody>
       </p:sp>
@@ -18039,7 +21265,7 @@
         </p:spPr>
         <p:txBody>
           <a:bodyPr wrap="square" lIns="38100" tIns="19050" rIns="38100" bIns="19050" anchor="ctr">
-            <a:normAutofit/>
+            <a:normAutofit fontScale="85000" lnSpcReduction="10000"/>
           </a:bodyPr>
           <a:lstStyle/>
           <a:p>
@@ -18054,7 +21280,7 @@
               </a:defRPr>
             </a:pPr>
             <a:r>
-              <a:rPr sz="2400" b="1" i="0">
+              <a:rPr lang="mk-MK" sz="2400" b="1" i="0" dirty="0">
                 <a:solidFill>
                   <a:srgbClr val="8064A2"/>
                 </a:solidFill>
@@ -18062,8 +21288,16 @@
                 <a:ea typeface="Arial"/>
                 <a:cs typeface="Arial"/>
               </a:rPr>
-              <a:t>1.639</a:t>
-            </a:r>
+              <a:t>Кандидати</a:t>
+            </a:r>
+            <a:endParaRPr sz="2400" b="1" i="0" dirty="0">
+              <a:solidFill>
+                <a:srgbClr val="8064A2"/>
+              </a:solidFill>
+              <a:latin typeface="Arial"/>
+              <a:ea typeface="Arial"/>
+              <a:cs typeface="Arial"/>
+            </a:endParaRPr>
           </a:p>
         </p:txBody>
       </p:sp>
@@ -18112,7 +21346,7 @@
               </a:defRPr>
             </a:pPr>
             <a:r>
-              <a:rPr sz="1200" b="0" i="0">
+              <a:rPr lang="mk-MK" sz="1200" b="0" i="0" dirty="0">
                 <a:solidFill>
                   <a:srgbClr val="617080"/>
                 </a:solidFill>
@@ -18120,8 +21354,16 @@
                 <a:ea typeface="Arial"/>
                 <a:cs typeface="Arial"/>
               </a:rPr>
-              <a:t>тестирање</a:t>
-            </a:r>
+              <a:t>10-15</a:t>
+            </a:r>
+            <a:endParaRPr sz="1200" b="0" i="0" dirty="0">
+              <a:solidFill>
+                <a:srgbClr val="617080"/>
+              </a:solidFill>
+              <a:latin typeface="Arial"/>
+              <a:ea typeface="Arial"/>
+              <a:cs typeface="Arial"/>
+            </a:endParaRPr>
           </a:p>
         </p:txBody>
       </p:sp>
@@ -18183,7 +21425,7 @@
         </p:nvSpPr>
         <p:spPr>
           <a:xfrm>
-            <a:off x="5953125" y="3771900"/>
+            <a:off x="5953125" y="3919401"/>
             <a:ext cx="4495800" cy="514350"/>
           </a:xfrm>
           <a:prstGeom prst="rect">
@@ -18212,7 +21454,18 @@
               </a:defRPr>
             </a:pPr>
             <a:r>
-              <a:rPr sz="3000" b="1" i="0">
+              <a:rPr lang="mk-MK" sz="3000" b="1" dirty="0">
+                <a:solidFill>
+                  <a:srgbClr val="617080"/>
+                </a:solidFill>
+                <a:latin typeface="Arial"/>
+                <a:ea typeface="Arial"/>
+                <a:cs typeface="Arial"/>
+              </a:rPr>
+              <a:t>2.848</a:t>
+            </a:r>
+            <a:r>
+              <a:rPr lang="mk-MK" sz="3000" b="1" dirty="0">
                 <a:solidFill>
                   <a:srgbClr val="4F86C6"/>
                 </a:solidFill>
@@ -18220,6 +21473,28 @@
                 <a:ea typeface="Arial"/>
                 <a:cs typeface="Arial"/>
               </a:rPr>
+              <a:t> /</a:t>
+            </a:r>
+            <a:r>
+              <a:rPr lang="en-US" sz="3000" b="1" dirty="0">
+                <a:solidFill>
+                  <a:srgbClr val="4F86C6"/>
+                </a:solidFill>
+                <a:latin typeface="Arial"/>
+                <a:ea typeface="Arial"/>
+                <a:cs typeface="Arial"/>
+              </a:rPr>
+              <a:t> </a:t>
+            </a:r>
+            <a:r>
+              <a:rPr sz="3000" b="1" i="0" dirty="0">
+                <a:solidFill>
+                  <a:srgbClr val="4F86C6"/>
+                </a:solidFill>
+                <a:latin typeface="Arial"/>
+                <a:ea typeface="Arial"/>
+                <a:cs typeface="Arial"/>
+              </a:rPr>
               <a:t>1.889</a:t>
             </a:r>
           </a:p>
@@ -18241,7 +21516,7 @@
         </p:nvSpPr>
         <p:spPr>
           <a:xfrm>
-            <a:off x="5953125" y="4229100"/>
+            <a:off x="5953125" y="4429125"/>
             <a:ext cx="4495800" cy="523875"/>
           </a:xfrm>
           <a:prstGeom prst="rect">
@@ -18270,7 +21545,7 @@
               </a:defRPr>
             </a:pPr>
             <a:r>
-              <a:rPr sz="1350" b="0" i="0">
+              <a:rPr sz="1350" b="0" i="0" dirty="0" err="1">
                 <a:solidFill>
                   <a:srgbClr val="617080"/>
                 </a:solidFill>
@@ -18278,8 +21553,115 @@
                 <a:ea typeface="Arial"/>
                 <a:cs typeface="Arial"/>
               </a:rPr>
-              <a:t>обединети примероци за евалуација пред филтрирањето</a:t>
-            </a:r>
+              <a:t>примероци</a:t>
+            </a:r>
+            <a:r>
+              <a:rPr sz="1350" b="0" i="0" dirty="0">
+                <a:solidFill>
+                  <a:srgbClr val="617080"/>
+                </a:solidFill>
+                <a:latin typeface="Arial"/>
+                <a:ea typeface="Arial"/>
+                <a:cs typeface="Arial"/>
+              </a:rPr>
+              <a:t> </a:t>
+            </a:r>
+            <a:r>
+              <a:rPr sz="1350" b="0" i="0" dirty="0" err="1">
+                <a:solidFill>
+                  <a:srgbClr val="617080"/>
+                </a:solidFill>
+                <a:latin typeface="Arial"/>
+                <a:ea typeface="Arial"/>
+                <a:cs typeface="Arial"/>
+              </a:rPr>
+              <a:t>за</a:t>
+            </a:r>
+            <a:r>
+              <a:rPr sz="1350" b="0" i="0" dirty="0">
+                <a:solidFill>
+                  <a:srgbClr val="617080"/>
+                </a:solidFill>
+                <a:latin typeface="Arial"/>
+                <a:ea typeface="Arial"/>
+                <a:cs typeface="Arial"/>
+              </a:rPr>
+              <a:t> </a:t>
+            </a:r>
+            <a:r>
+              <a:rPr lang="mk-MK" sz="1350" b="0" i="0" dirty="0">
+                <a:solidFill>
+                  <a:srgbClr val="617080"/>
+                </a:solidFill>
+                <a:latin typeface="Arial"/>
+                <a:ea typeface="Arial"/>
+                <a:cs typeface="Arial"/>
+              </a:rPr>
+              <a:t>тренирање </a:t>
+            </a:r>
+            <a:r>
+              <a:rPr lang="mk-MK" sz="1350" dirty="0">
+                <a:solidFill>
+                  <a:srgbClr val="617080"/>
+                </a:solidFill>
+                <a:latin typeface="Arial"/>
+                <a:ea typeface="Arial"/>
+                <a:cs typeface="Arial"/>
+              </a:rPr>
+              <a:t>·</a:t>
+            </a:r>
+            <a:r>
+              <a:rPr sz="1350" b="0" i="0" dirty="0">
+                <a:solidFill>
+                  <a:srgbClr val="617080"/>
+                </a:solidFill>
+                <a:latin typeface="Arial"/>
+                <a:ea typeface="Arial"/>
+                <a:cs typeface="Arial"/>
+              </a:rPr>
+              <a:t> </a:t>
+            </a:r>
+            <a:r>
+              <a:rPr lang="mk-MK" sz="1350" dirty="0">
+                <a:solidFill>
+                  <a:srgbClr val="4F86C6"/>
+                </a:solidFill>
+                <a:latin typeface="Arial"/>
+                <a:ea typeface="Arial"/>
+                <a:cs typeface="Arial"/>
+              </a:rPr>
+              <a:t>примероци за</a:t>
+            </a:r>
+            <a:r>
+              <a:rPr sz="1350" b="0" i="0" dirty="0">
+                <a:solidFill>
+                  <a:srgbClr val="4F86C6"/>
+                </a:solidFill>
+                <a:latin typeface="Arial"/>
+                <a:ea typeface="Arial"/>
+                <a:cs typeface="Arial"/>
+              </a:rPr>
+              <a:t> </a:t>
+            </a:r>
+            <a:r>
+              <a:rPr lang="mk-MK" sz="1350" b="0" i="0" dirty="0">
+                <a:solidFill>
+                  <a:srgbClr val="4F86C6"/>
+                </a:solidFill>
+                <a:latin typeface="Arial"/>
+                <a:ea typeface="Arial"/>
+                <a:cs typeface="Arial"/>
+              </a:rPr>
+              <a:t>евалуација</a:t>
+            </a:r>
+            <a:endParaRPr sz="1350" b="0" i="0" dirty="0">
+              <a:solidFill>
+                <a:srgbClr val="4F86C6"/>
+              </a:solidFill>
+              <a:latin typeface="Arial"/>
+              <a:ea typeface="Arial"/>
+              <a:cs typeface="Arial"/>
+            </a:endParaRPr>
           </a:p>
         </p:txBody>
       </p:sp>
@@ -19264,15 +22646,202 @@
               </a:defRPr>
             </a:pPr>
             <a:r>
-              <a:rPr sz="1575" b="1" i="0">
-                <a:solidFill>
-                  <a:srgbClr val="263746"/>
-                </a:solidFill>
-                <a:latin typeface="Arial"/>
-                <a:ea typeface="Arial"/>
-                <a:cs typeface="Arial"/>
-              </a:rPr>
-              <a:t>Од фиксно семантичко пондерирање кон научен gate за конкретното прашање.</a:t>
+              <a:rPr sz="1575" b="1" i="0" dirty="0" err="1">
+                <a:solidFill>
+                  <a:srgbClr val="263746"/>
+                </a:solidFill>
+                <a:latin typeface="Arial"/>
+                <a:ea typeface="Arial"/>
+                <a:cs typeface="Arial"/>
+              </a:rPr>
+              <a:t>Од</a:t>
+            </a:r>
+            <a:r>
+              <a:rPr sz="1575" b="1" i="0" dirty="0">
+                <a:solidFill>
+                  <a:srgbClr val="263746"/>
+                </a:solidFill>
+                <a:latin typeface="Arial"/>
+                <a:ea typeface="Arial"/>
+                <a:cs typeface="Arial"/>
+              </a:rPr>
+              <a:t> </a:t>
+            </a:r>
+            <a:r>
+              <a:rPr sz="1575" b="1" i="0" dirty="0" err="1">
+                <a:solidFill>
+                  <a:srgbClr val="263746"/>
+                </a:solidFill>
+                <a:latin typeface="Arial"/>
+                <a:ea typeface="Arial"/>
+                <a:cs typeface="Arial"/>
+              </a:rPr>
+              <a:t>фиксно</a:t>
+            </a:r>
+            <a:r>
+              <a:rPr sz="1575" b="1" i="0" dirty="0">
+                <a:solidFill>
+                  <a:srgbClr val="263746"/>
+                </a:solidFill>
+                <a:latin typeface="Arial"/>
+                <a:ea typeface="Arial"/>
+                <a:cs typeface="Arial"/>
+              </a:rPr>
+              <a:t> </a:t>
+            </a:r>
+            <a:r>
+              <a:rPr sz="1575" b="1" i="0" dirty="0" err="1">
+                <a:solidFill>
+                  <a:srgbClr val="263746"/>
+                </a:solidFill>
+                <a:latin typeface="Arial"/>
+                <a:ea typeface="Arial"/>
+                <a:cs typeface="Arial"/>
+              </a:rPr>
+              <a:t>семантичко</a:t>
+            </a:r>
+            <a:r>
+              <a:rPr sz="1575" b="1" i="0" dirty="0">
+                <a:solidFill>
+                  <a:srgbClr val="263746"/>
+                </a:solidFill>
+                <a:latin typeface="Arial"/>
+                <a:ea typeface="Arial"/>
+                <a:cs typeface="Arial"/>
+              </a:rPr>
+              <a:t> </a:t>
+            </a:r>
+            <a:r>
+              <a:rPr sz="1575" b="1" i="0" dirty="0" err="1">
+                <a:solidFill>
+                  <a:srgbClr val="263746"/>
+                </a:solidFill>
+                <a:latin typeface="Arial"/>
+                <a:ea typeface="Arial"/>
+                <a:cs typeface="Arial"/>
+              </a:rPr>
+              <a:t>пондерирање</a:t>
+            </a:r>
+            <a:r>
+              <a:rPr sz="1575" b="1" i="0" dirty="0">
+                <a:solidFill>
+                  <a:srgbClr val="263746"/>
+                </a:solidFill>
+                <a:latin typeface="Arial"/>
+                <a:ea typeface="Arial"/>
+                <a:cs typeface="Arial"/>
+              </a:rPr>
+              <a:t> </a:t>
+            </a:r>
+            <a:r>
+              <a:rPr sz="1575" b="1" i="0" dirty="0" err="1">
+                <a:solidFill>
+                  <a:srgbClr val="263746"/>
+                </a:solidFill>
+                <a:latin typeface="Arial"/>
+                <a:ea typeface="Arial"/>
+                <a:cs typeface="Arial"/>
+              </a:rPr>
+              <a:t>кон</a:t>
+            </a:r>
+            <a:r>
+              <a:rPr sz="1575" b="1" i="0" dirty="0">
+                <a:solidFill>
+                  <a:srgbClr val="263746"/>
+                </a:solidFill>
+                <a:latin typeface="Arial"/>
+                <a:ea typeface="Arial"/>
+                <a:cs typeface="Arial"/>
+              </a:rPr>
+              <a:t> </a:t>
+            </a:r>
+            <a:r>
+              <a:rPr sz="1575" b="1" i="0" dirty="0" err="1">
+                <a:solidFill>
+                  <a:srgbClr val="263746"/>
+                </a:solidFill>
+                <a:latin typeface="Arial"/>
+                <a:ea typeface="Arial"/>
+                <a:cs typeface="Arial"/>
+              </a:rPr>
+              <a:t>научен</a:t>
+            </a:r>
+            <a:r>
+              <a:rPr sz="1575" b="1" i="0" dirty="0">
+                <a:solidFill>
+                  <a:srgbClr val="263746"/>
+                </a:solidFill>
+                <a:latin typeface="Arial"/>
+                <a:ea typeface="Arial"/>
+                <a:cs typeface="Arial"/>
+              </a:rPr>
+              <a:t> gate </a:t>
+            </a:r>
+            <a:r>
+              <a:rPr sz="1575" b="1" i="0" dirty="0" err="1">
+                <a:solidFill>
+                  <a:srgbClr val="263746"/>
+                </a:solidFill>
+                <a:latin typeface="Arial"/>
+                <a:ea typeface="Arial"/>
+                <a:cs typeface="Arial"/>
+              </a:rPr>
+              <a:t>за</a:t>
+            </a:r>
+            <a:r>
+              <a:rPr sz="1575" b="1" i="0" dirty="0">
+                <a:solidFill>
+                  <a:srgbClr val="263746"/>
+                </a:solidFill>
+                <a:latin typeface="Arial"/>
+                <a:ea typeface="Arial"/>
+                <a:cs typeface="Arial"/>
+              </a:rPr>
+              <a:t> </a:t>
+            </a:r>
+            <a:r>
+              <a:rPr sz="1575" b="1" i="0" dirty="0" err="1">
+                <a:solidFill>
+                  <a:srgbClr val="263746"/>
+                </a:solidFill>
+                <a:latin typeface="Arial"/>
+                <a:ea typeface="Arial"/>
+                <a:cs typeface="Arial"/>
+              </a:rPr>
+              <a:t>конкретното</a:t>
+            </a:r>
+            <a:r>
+              <a:rPr sz="1575" b="1" i="0" dirty="0">
+                <a:solidFill>
+                  <a:srgbClr val="263746"/>
+                </a:solidFill>
+                <a:latin typeface="Arial"/>
+                <a:ea typeface="Arial"/>
+                <a:cs typeface="Arial"/>
+              </a:rPr>
+              <a:t> </a:t>
+            </a:r>
+            <a:r>
+              <a:rPr sz="1575" b="1" i="0" dirty="0" err="1">
+                <a:solidFill>
+                  <a:srgbClr val="263746"/>
+                </a:solidFill>
+                <a:latin typeface="Arial"/>
+                <a:ea typeface="Arial"/>
+                <a:cs typeface="Arial"/>
+              </a:rPr>
+              <a:t>прашање</a:t>
+            </a:r>
+            <a:r>
+              <a:rPr sz="1575" b="1" i="0" dirty="0">
+                <a:solidFill>
+                  <a:srgbClr val="263746"/>
+                </a:solidFill>
+                <a:latin typeface="Arial"/>
+                <a:ea typeface="Arial"/>
+                <a:cs typeface="Arial"/>
+              </a:rPr>
+              <a:t>.</a:t>
             </a:r>
           </a:p>
         </p:txBody>
